--- a/TLM-Finance-Presentation.pptx
+++ b/TLM-Finance-Presentation.pptx
@@ -4,6 +4,9 @@
   <p:sldMasterIdLst>
     <p:sldMasterId id="2147483648" r:id="rId1"/>
   </p:sldMasterIdLst>
+  <p:notesMasterIdLst>
+    <p:notesMasterId r:id="rId27"/>
+  </p:notesMasterIdLst>
   <p:sldIdLst>
     <p:sldId id="256" r:id="rId2"/>
     <p:sldId id="257" r:id="rId3"/>
@@ -31,10 +34,7 @@
     <p:sldId id="279" r:id="rId25"/>
     <p:sldId id="280" r:id="rId26"/>
   </p:sldIdLst>
-  <p:notesMasterIdLst>
-    <p:notesMasterId r:id="rId27"/>
-  </p:notesMasterIdLst>
-  <p:sldSz cx="9144000" cy="5143500"/>
+  <p:sldSz cx="9144000" cy="5143500" type="screen16x9"/>
   <p:notesSz cx="5143500" cy="9144000"/>
   <p:defaultTextStyle>
     <a:lvl1pPr marL="0" algn="l" defTabSz="914400" rtl="0" eaLnBrk="1" latinLnBrk="0" hangingPunct="1">
@@ -128,6 +128,11 @@
       </a:defRPr>
     </a:lvl9pPr>
   </p:defaultTextStyle>
+  <p:extLst>
+    <p:ext uri="{EFAFB233-063F-42B5-8137-9DF3F51BA10A}">
+      <p15:sldGuideLst xmlns:p15="http://schemas.microsoft.com/office/powerpoint/2012/main"/>
+    </p:ext>
+  </p:extLst>
 </p:presentation>
 </file>
 
@@ -153,234 +158,10 @@
           <a:chExt cx="0" cy="0"/>
         </a:xfrm>
       </p:grpSpPr>
-      <p:sp>
-        <p:nvSpPr>
-          <p:cNvPr id="2" name="Header Placeholder 1"/>
-          <p:cNvSpPr>
-            <a:spLocks noGrp="1"/>
-          </p:cNvSpPr>
-          <p:nvPr>
-            <p:ph type="hdr" sz="quarter"/>
-          </p:nvPr>
-        </p:nvSpPr>
-        <p:spPr>
-          <a:xfrm>
-            <a:off x="0" y="0"/>
-            <a:ext cx="2971800" cy="458788"/>
-          </a:xfrm>
-          <a:prstGeom prst="rect">
-            <a:avLst/>
-          </a:prstGeom>
-        </p:spPr>
-        <p:txBody>
-          <a:bodyPr vert="horz" lIns="91440" tIns="45720" rIns="91440" bIns="45720" rtlCol="0"/>
-          <a:lstStyle>
-            <a:lvl1pPr algn="l">
-              <a:defRPr sz="1200"/>
-            </a:lvl1pPr>
-          </a:lstStyle>
-          <a:p>
-            <a:endParaRPr lang="en-US"/>
-          </a:p>
-        </p:txBody>
-      </p:sp>
-      <p:sp>
-        <p:nvSpPr>
-          <p:cNvPr id="3" name="Date Placeholder 2"/>
-          <p:cNvSpPr>
-            <a:spLocks noGrp="1"/>
-          </p:cNvSpPr>
-          <p:nvPr>
-            <p:ph type="dt" idx="1"/>
-          </p:nvPr>
-        </p:nvSpPr>
-        <p:spPr>
-          <a:xfrm>
-            <a:off x="3884613" y="0"/>
-            <a:ext cx="2971800" cy="458788"/>
-          </a:xfrm>
-          <a:prstGeom prst="rect">
-            <a:avLst/>
-          </a:prstGeom>
-        </p:spPr>
-        <p:txBody>
-          <a:bodyPr vert="horz" lIns="91440" tIns="45720" rIns="91440" bIns="45720" rtlCol="0"/>
-          <a:lstStyle>
-            <a:lvl1pPr algn="r">
-              <a:defRPr sz="1200"/>
-            </a:lvl1pPr>
-          </a:lstStyle>
-          <a:p>
-            <a:fld id="{5282F153-3F37-0F45-9E97-73ACFA13230C}" type="datetimeFigureOut">
-              <a:rPr lang="en-US"/>
-              <a:t>7/23/19</a:t>
-            </a:fld>
-            <a:endParaRPr lang="en-US"/>
-          </a:p>
-        </p:txBody>
-      </p:sp>
-      <p:sp>
-        <p:nvSpPr>
-          <p:cNvPr id="4" name="Slide Image Placeholder 3"/>
-          <p:cNvSpPr>
-            <a:spLocks noGrp="1" noRot="1" noChangeAspect="1"/>
-          </p:cNvSpPr>
-          <p:nvPr>
-            <p:ph type="sldImg" idx="2"/>
-          </p:nvPr>
-        </p:nvSpPr>
-        <p:spPr>
-          <a:xfrm>
-            <a:off x="685800" y="1143000"/>
-            <a:ext cx="5486400" cy="3086100"/>
-          </a:xfrm>
-          <a:prstGeom prst="rect">
-            <a:avLst/>
-          </a:prstGeom>
-          <a:noFill/>
-          <a:ln w="12700">
-            <a:solidFill>
-              <a:prstClr val="black"/>
-            </a:solidFill>
-          </a:ln>
-        </p:spPr>
-        <p:txBody>
-          <a:bodyPr vert="horz" lIns="91440" tIns="45720" rIns="91440" bIns="45720" rtlCol="0" anchor="ctr"/>
-          <a:lstStyle/>
-          <a:p>
-            <a:endParaRPr lang="en-US"/>
-          </a:p>
-        </p:txBody>
-      </p:sp>
-      <p:sp>
-        <p:nvSpPr>
-          <p:cNvPr id="5" name="Notes Placeholder 4"/>
-          <p:cNvSpPr>
-            <a:spLocks noGrp="1"/>
-          </p:cNvSpPr>
-          <p:nvPr>
-            <p:ph type="body" sz="quarter" idx="3"/>
-          </p:nvPr>
-        </p:nvSpPr>
-        <p:spPr>
-          <a:xfrm>
-            <a:off x="685800" y="4400550"/>
-            <a:ext cx="5486400" cy="3600450"/>
-          </a:xfrm>
-          <a:prstGeom prst="rect">
-            <a:avLst/>
-          </a:prstGeom>
-        </p:spPr>
-        <p:txBody>
-          <a:bodyPr vert="horz" lIns="91440" tIns="45720" rIns="91440" bIns="45720" rtlCol="0"/>
-          <a:lstStyle/>
-          <a:p>
-            <a:pPr lvl="0"/>
-            <a:r>
-              <a:rPr lang="en-US"/>
-              <a:t>Click to edit Master text styles</a:t>
-            </a:r>
-          </a:p>
-          <a:p>
-            <a:pPr lvl="1"/>
-            <a:r>
-              <a:rPr lang="en-US"/>
-              <a:t>Second level</a:t>
-            </a:r>
-          </a:p>
-          <a:p>
-            <a:pPr lvl="2"/>
-            <a:r>
-              <a:rPr lang="en-US"/>
-              <a:t>Third level</a:t>
-            </a:r>
-          </a:p>
-          <a:p>
-            <a:pPr lvl="3"/>
-            <a:r>
-              <a:rPr lang="en-US"/>
-              <a:t>Fourth level</a:t>
-            </a:r>
-          </a:p>
-          <a:p>
-            <a:pPr lvl="4"/>
-            <a:r>
-              <a:rPr lang="en-US"/>
-              <a:t>Fifth level</a:t>
-            </a:r>
-          </a:p>
-        </p:txBody>
-      </p:sp>
-      <p:sp>
-        <p:nvSpPr>
-          <p:cNvPr id="6" name="Footer Placeholder 5"/>
-          <p:cNvSpPr>
-            <a:spLocks noGrp="1"/>
-          </p:cNvSpPr>
-          <p:nvPr>
-            <p:ph type="ftr" sz="quarter" idx="4"/>
-          </p:nvPr>
-        </p:nvSpPr>
-        <p:spPr>
-          <a:xfrm>
-            <a:off x="0" y="8685213"/>
-            <a:ext cx="2971800" cy="458787"/>
-          </a:xfrm>
-          <a:prstGeom prst="rect">
-            <a:avLst/>
-          </a:prstGeom>
-        </p:spPr>
-        <p:txBody>
-          <a:bodyPr vert="horz" lIns="91440" tIns="45720" rIns="91440" bIns="45720" rtlCol="0" anchor="b"/>
-          <a:lstStyle>
-            <a:lvl1pPr algn="l">
-              <a:defRPr sz="1200"/>
-            </a:lvl1pPr>
-          </a:lstStyle>
-          <a:p>
-            <a:endParaRPr lang="en-US"/>
-          </a:p>
-        </p:txBody>
-      </p:sp>
-      <p:sp>
-        <p:nvSpPr>
-          <p:cNvPr id="7" name="Slide Number Placeholder 6"/>
-          <p:cNvSpPr>
-            <a:spLocks noGrp="1"/>
-          </p:cNvSpPr>
-          <p:nvPr>
-            <p:ph type="sldNum" sz="quarter" idx="5"/>
-          </p:nvPr>
-        </p:nvSpPr>
-        <p:spPr>
-          <a:xfrm>
-            <a:off x="3884613" y="8685213"/>
-            <a:ext cx="2971800" cy="458787"/>
-          </a:xfrm>
-          <a:prstGeom prst="rect">
-            <a:avLst/>
-          </a:prstGeom>
-        </p:spPr>
-        <p:txBody>
-          <a:bodyPr vert="horz" lIns="91440" tIns="45720" rIns="91440" bIns="45720" rtlCol="0" anchor="b"/>
-          <a:lstStyle>
-            <a:lvl1pPr algn="r">
-              <a:defRPr sz="1200"/>
-            </a:lvl1pPr>
-          </a:lstStyle>
-          <a:p>
-            <a:fld id="{CE5E9CC1-C706-0F49-92D6-E571CC5EEA8F}" type="slidenum">
-              <a:rPr lang="en-US"/>
-              <a:t>‹#›</a:t>
-            </a:fld>
-            <a:endParaRPr lang="en-US"/>
-          </a:p>
-        </p:txBody>
-      </p:sp>
     </p:spTree>
     <p:extLst>
       <p:ext uri="{BB962C8B-B14F-4D97-AF65-F5344CB8AC3E}">
-        <p14:creationId xmlns:p14="http://schemas.microsoft.com/office/powerpoint/2010/main" val="1024086991"/>
+        <p14:creationId xmlns:p14="http://schemas.microsoft.com/office/powerpoint/2010/main" val="2284620991"/>
       </p:ext>
     </p:extLst>
   </p:cSld>
@@ -524,10 +305,6 @@
           <a:bodyPr/>
           <a:lstStyle/>
           <a:p>
-            <a:r>
-              <a:rPr lang="en-US" dirty="0"/>
-              <a:t/>
-            </a:r>
             <a:endParaRPr lang="en-US" dirty="0"/>
           </a:p>
         </p:txBody>
@@ -612,10 +389,6 @@
           <a:bodyPr/>
           <a:lstStyle/>
           <a:p>
-            <a:r>
-              <a:rPr lang="en-US" dirty="0"/>
-              <a:t/>
-            </a:r>
             <a:endParaRPr lang="en-US" dirty="0"/>
           </a:p>
         </p:txBody>
@@ -700,10 +473,6 @@
           <a:bodyPr/>
           <a:lstStyle/>
           <a:p>
-            <a:r>
-              <a:rPr lang="en-US" dirty="0"/>
-              <a:t/>
-            </a:r>
             <a:endParaRPr lang="en-US" dirty="0"/>
           </a:p>
         </p:txBody>
@@ -788,10 +557,6 @@
           <a:bodyPr/>
           <a:lstStyle/>
           <a:p>
-            <a:r>
-              <a:rPr lang="en-US" dirty="0"/>
-              <a:t/>
-            </a:r>
             <a:endParaRPr lang="en-US" dirty="0"/>
           </a:p>
         </p:txBody>
@@ -876,10 +641,6 @@
           <a:bodyPr/>
           <a:lstStyle/>
           <a:p>
-            <a:r>
-              <a:rPr lang="en-US" dirty="0"/>
-              <a:t/>
-            </a:r>
             <a:endParaRPr lang="en-US" dirty="0"/>
           </a:p>
         </p:txBody>
@@ -964,10 +725,6 @@
           <a:bodyPr/>
           <a:lstStyle/>
           <a:p>
-            <a:r>
-              <a:rPr lang="en-US" dirty="0"/>
-              <a:t/>
-            </a:r>
             <a:endParaRPr lang="en-US" dirty="0"/>
           </a:p>
         </p:txBody>
@@ -1052,10 +809,6 @@
           <a:bodyPr/>
           <a:lstStyle/>
           <a:p>
-            <a:r>
-              <a:rPr lang="en-US" dirty="0"/>
-              <a:t/>
-            </a:r>
             <a:endParaRPr lang="en-US" dirty="0"/>
           </a:p>
         </p:txBody>
@@ -1140,10 +893,6 @@
           <a:bodyPr/>
           <a:lstStyle/>
           <a:p>
-            <a:r>
-              <a:rPr lang="en-US" dirty="0"/>
-              <a:t/>
-            </a:r>
             <a:endParaRPr lang="en-US" dirty="0"/>
           </a:p>
         </p:txBody>
@@ -1228,10 +977,6 @@
           <a:bodyPr/>
           <a:lstStyle/>
           <a:p>
-            <a:r>
-              <a:rPr lang="en-US" dirty="0"/>
-              <a:t/>
-            </a:r>
             <a:endParaRPr lang="en-US" dirty="0"/>
           </a:p>
         </p:txBody>
@@ -1316,10 +1061,6 @@
           <a:bodyPr/>
           <a:lstStyle/>
           <a:p>
-            <a:r>
-              <a:rPr lang="en-US" dirty="0"/>
-              <a:t/>
-            </a:r>
             <a:endParaRPr lang="en-US" dirty="0"/>
           </a:p>
         </p:txBody>
@@ -1404,10 +1145,6 @@
           <a:bodyPr/>
           <a:lstStyle/>
           <a:p>
-            <a:r>
-              <a:rPr lang="en-US" dirty="0"/>
-              <a:t/>
-            </a:r>
             <a:endParaRPr lang="en-US" dirty="0"/>
           </a:p>
         </p:txBody>
@@ -1492,10 +1229,6 @@
           <a:bodyPr/>
           <a:lstStyle/>
           <a:p>
-            <a:r>
-              <a:rPr lang="en-US" dirty="0"/>
-              <a:t/>
-            </a:r>
             <a:endParaRPr lang="en-US" dirty="0"/>
           </a:p>
         </p:txBody>
@@ -1580,10 +1313,6 @@
           <a:bodyPr/>
           <a:lstStyle/>
           <a:p>
-            <a:r>
-              <a:rPr lang="en-US" dirty="0"/>
-              <a:t/>
-            </a:r>
             <a:endParaRPr lang="en-US" dirty="0"/>
           </a:p>
         </p:txBody>
@@ -1668,10 +1397,6 @@
           <a:bodyPr/>
           <a:lstStyle/>
           <a:p>
-            <a:r>
-              <a:rPr lang="en-US" dirty="0"/>
-              <a:t/>
-            </a:r>
             <a:endParaRPr lang="en-US" dirty="0"/>
           </a:p>
         </p:txBody>
@@ -1756,10 +1481,6 @@
           <a:bodyPr/>
           <a:lstStyle/>
           <a:p>
-            <a:r>
-              <a:rPr lang="en-US" dirty="0"/>
-              <a:t/>
-            </a:r>
             <a:endParaRPr lang="en-US" dirty="0"/>
           </a:p>
         </p:txBody>
@@ -1844,10 +1565,6 @@
           <a:bodyPr/>
           <a:lstStyle/>
           <a:p>
-            <a:r>
-              <a:rPr lang="en-US" dirty="0"/>
-              <a:t/>
-            </a:r>
             <a:endParaRPr lang="en-US" dirty="0"/>
           </a:p>
         </p:txBody>
@@ -1932,10 +1649,6 @@
           <a:bodyPr/>
           <a:lstStyle/>
           <a:p>
-            <a:r>
-              <a:rPr lang="en-US" dirty="0"/>
-              <a:t/>
-            </a:r>
             <a:endParaRPr lang="en-US" dirty="0"/>
           </a:p>
         </p:txBody>
@@ -2020,10 +1733,6 @@
           <a:bodyPr/>
           <a:lstStyle/>
           <a:p>
-            <a:r>
-              <a:rPr lang="en-US" dirty="0"/>
-              <a:t/>
-            </a:r>
             <a:endParaRPr lang="en-US" dirty="0"/>
           </a:p>
         </p:txBody>
@@ -2108,10 +1817,6 @@
           <a:bodyPr/>
           <a:lstStyle/>
           <a:p>
-            <a:r>
-              <a:rPr lang="en-US" dirty="0"/>
-              <a:t/>
-            </a:r>
             <a:endParaRPr lang="en-US" dirty="0"/>
           </a:p>
         </p:txBody>
@@ -2196,10 +1901,6 @@
           <a:bodyPr/>
           <a:lstStyle/>
           <a:p>
-            <a:r>
-              <a:rPr lang="en-US" dirty="0"/>
-              <a:t/>
-            </a:r>
             <a:endParaRPr lang="en-US" dirty="0"/>
           </a:p>
         </p:txBody>
@@ -2284,10 +1985,6 @@
           <a:bodyPr/>
           <a:lstStyle/>
           <a:p>
-            <a:r>
-              <a:rPr lang="en-US" dirty="0"/>
-              <a:t/>
-            </a:r>
             <a:endParaRPr lang="en-US" dirty="0"/>
           </a:p>
         </p:txBody>
@@ -2372,10 +2069,6 @@
           <a:bodyPr/>
           <a:lstStyle/>
           <a:p>
-            <a:r>
-              <a:rPr lang="en-US" dirty="0"/>
-              <a:t/>
-            </a:r>
             <a:endParaRPr lang="en-US" dirty="0"/>
           </a:p>
         </p:txBody>
@@ -2460,10 +2153,6 @@
           <a:bodyPr/>
           <a:lstStyle/>
           <a:p>
-            <a:r>
-              <a:rPr lang="en-US" dirty="0"/>
-              <a:t/>
-            </a:r>
             <a:endParaRPr lang="en-US" dirty="0"/>
           </a:p>
         </p:txBody>
@@ -2548,10 +2237,6 @@
           <a:bodyPr/>
           <a:lstStyle/>
           <a:p>
-            <a:r>
-              <a:rPr lang="en-US" dirty="0"/>
-              <a:t/>
-            </a:r>
             <a:endParaRPr lang="en-US" dirty="0"/>
           </a:p>
         </p:txBody>
@@ -2636,10 +2321,6 @@
           <a:bodyPr/>
           <a:lstStyle/>
           <a:p>
-            <a:r>
-              <a:rPr lang="en-US" dirty="0"/>
-              <a:t/>
-            </a:r>
             <a:endParaRPr lang="en-US" dirty="0"/>
           </a:p>
         </p:txBody>
@@ -2713,6 +2394,11 @@
 <file path=ppt/slideMasters/slideMaster1.xml><?xml version="1.0" encoding="utf-8"?>
 <p:sldMaster xmlns:a="http://schemas.openxmlformats.org/drawingml/2006/main" xmlns:r="http://schemas.openxmlformats.org/officeDocument/2006/relationships" xmlns:p="http://schemas.openxmlformats.org/presentationml/2006/main">
   <p:cSld>
+    <p:bg>
+      <p:bgRef idx="1001">
+        <a:schemeClr val="bg1"/>
+      </p:bgRef>
+    </p:bg>
     <p:spTree>
       <p:nvGrpSpPr>
         <p:cNvPr id="1" name=""/>
@@ -2995,6 +2681,7 @@
         <a:solidFill>
           <a:srgbClr val="0E0E0E"/>
         </a:solidFill>
+        <a:effectLst/>
       </p:bgPr>
     </p:bg>
     <p:spTree>
@@ -3086,11 +2773,11 @@
           <a:bodyPr wrap="square" rtlCol="0" anchor="ctr"/>
           <a:lstStyle/>
           <a:p>
-            <a:pPr indent="0" marL="0">
-              <a:buNone/>
-            </a:pPr>
-            <a:r>
-              <a:rPr lang="en-US" sz="1400" b="1" spc="800" kern="0" dirty="0">
+            <a:pPr marL="0" indent="0">
+              <a:buNone/>
+            </a:pPr>
+            <a:r>
+              <a:rPr lang="en-US" sz="1400" b="1" kern="0" spc="800" dirty="0">
                 <a:solidFill>
                   <a:srgbClr val="DAA520"/>
                 </a:solidFill>
@@ -3125,7 +2812,7 @@
           <a:bodyPr wrap="square" rtlCol="0" anchor="t"/>
           <a:lstStyle/>
           <a:p>
-            <a:pPr indent="0" marL="0">
+            <a:pPr marL="0" indent="0">
               <a:buNone/>
             </a:pPr>
             <a:r>
@@ -3140,9 +2827,6 @@
               <a:t>Paving the Road.
 </a:t>
             </a:r>
-            <a:pPr indent="0" marL="0">
-              <a:buNone/>
-            </a:pPr>
             <a:r>
               <a:rPr lang="en-US" sz="3000" i="1" dirty="0">
                 <a:solidFill>
@@ -3179,7 +2863,7 @@
           <a:bodyPr wrap="square" rtlCol="0" anchor="ctr"/>
           <a:lstStyle/>
           <a:p>
-            <a:pPr indent="0" marL="0">
+            <a:pPr marL="0" indent="0">
               <a:buNone/>
             </a:pPr>
             <a:r>
@@ -3218,11 +2902,11 @@
           <a:bodyPr wrap="square" rtlCol="0" anchor="ctr"/>
           <a:lstStyle/>
           <a:p>
-            <a:pPr indent="0" marL="0">
-              <a:buNone/>
-            </a:pPr>
-            <a:r>
-              <a:rPr lang="en-US" sz="1200" spc="400" kern="0" dirty="0">
+            <a:pPr marL="0" indent="0">
+              <a:buNone/>
+            </a:pPr>
+            <a:r>
+              <a:rPr lang="en-US" sz="1200" kern="0" spc="400" dirty="0" err="1">
                 <a:solidFill>
                   <a:srgbClr val="B5B0A8"/>
                 </a:solidFill>
@@ -3230,7 +2914,7 @@
                 <a:ea typeface="Calibri" pitchFamily="34" charset="-122"/>
                 <a:cs typeface="Calibri" pitchFamily="34" charset="-120"/>
               </a:rPr>
-              <a:t>Tyrrell K.D. Lemons · tlmfinance.netlify.app</a:t>
+              <a:t>TLMFinance.netlify.app</a:t>
             </a:r>
             <a:endParaRPr lang="en-US" sz="1200" dirty="0"/>
           </a:p>
@@ -3257,7 +2941,7 @@
           <a:bodyPr wrap="square" rtlCol="0" anchor="ctr"/>
           <a:lstStyle/>
           <a:p>
-            <a:pPr algn="r" indent="0" marL="0">
+            <a:pPr marL="0" indent="0" algn="r">
               <a:buNone/>
             </a:pPr>
             <a:r>
@@ -3296,7 +2980,7 @@
           <a:bodyPr wrap="square" rtlCol="0" anchor="ctr"/>
           <a:lstStyle/>
           <a:p>
-            <a:pPr indent="0" marL="0">
+            <a:pPr marL="0" indent="0">
               <a:buNone/>
             </a:pPr>
             <a:r>
@@ -3308,7 +2992,18 @@
                 <a:ea typeface="Calibri" pitchFamily="34" charset="-122"/>
                 <a:cs typeface="Calibri" pitchFamily="34" charset="-120"/>
               </a:rPr>
-              <a:t>TLM Finance · Internal</a:t>
+              <a:t>TLM </a:t>
+            </a:r>
+            <a:r>
+              <a:rPr lang="en-US" sz="900">
+                <a:solidFill>
+                  <a:srgbClr val="B5B0A8"/>
+                </a:solidFill>
+                <a:latin typeface="Calibri" pitchFamily="34" charset="0"/>
+                <a:ea typeface="Calibri" pitchFamily="34" charset="-122"/>
+                <a:cs typeface="Calibri" pitchFamily="34" charset="-120"/>
+              </a:rPr>
+              <a:t>Finance </a:t>
             </a:r>
             <a:endParaRPr lang="en-US" sz="900" dirty="0"/>
           </a:p>
@@ -3330,6 +3025,7 @@
         <a:solidFill>
           <a:srgbClr val="0E0E0E"/>
         </a:solidFill>
+        <a:effectLst/>
       </p:bgPr>
     </p:bg>
     <p:spTree>
@@ -3394,11 +3090,11 @@
           <a:bodyPr wrap="square" rtlCol="0" anchor="ctr"/>
           <a:lstStyle/>
           <a:p>
-            <a:pPr indent="0" marL="0">
-              <a:buNone/>
-            </a:pPr>
-            <a:r>
-              <a:rPr lang="en-US" sz="1100" b="1" spc="600" kern="0" dirty="0">
+            <a:pPr marL="0" indent="0">
+              <a:buNone/>
+            </a:pPr>
+            <a:r>
+              <a:rPr lang="en-US" sz="1100" b="1" kern="0" spc="600" dirty="0">
                 <a:solidFill>
                   <a:srgbClr val="DAA520"/>
                 </a:solidFill>
@@ -3433,7 +3129,7 @@
           <a:bodyPr wrap="square" rtlCol="0" anchor="ctr"/>
           <a:lstStyle/>
           <a:p>
-            <a:pPr indent="0" marL="0">
+            <a:pPr marL="0" indent="0">
               <a:buNone/>
             </a:pPr>
             <a:r>
@@ -3472,7 +3168,7 @@
           <a:bodyPr wrap="square" rtlCol="0" anchor="ctr"/>
           <a:lstStyle/>
           <a:p>
-            <a:pPr indent="0" marL="0">
+            <a:pPr marL="0" indent="0">
               <a:buNone/>
             </a:pPr>
             <a:r>
@@ -3511,7 +3207,7 @@
           <a:bodyPr wrap="square" rtlCol="0" anchor="ctr"/>
           <a:lstStyle/>
           <a:p>
-            <a:pPr indent="0" marL="0">
+            <a:pPr marL="0" indent="0">
               <a:spcAft>
                 <a:spcPts val="400"/>
               </a:spcAft>
@@ -3531,7 +3227,7 @@
             <a:endParaRPr lang="en-US" sz="1400" dirty="0"/>
           </a:p>
           <a:p>
-            <a:pPr indent="0" marL="0">
+            <a:pPr marL="0" indent="0">
               <a:spcAft>
                 <a:spcPts val="400"/>
               </a:spcAft>
@@ -3551,7 +3247,7 @@
             <a:endParaRPr lang="en-US" sz="1400" dirty="0"/>
           </a:p>
           <a:p>
-            <a:pPr indent="0" marL="0">
+            <a:pPr marL="0" indent="0">
               <a:spcAft>
                 <a:spcPts val="400"/>
               </a:spcAft>
@@ -3571,7 +3267,7 @@
             <a:endParaRPr lang="en-US" sz="1400" dirty="0"/>
           </a:p>
           <a:p>
-            <a:pPr indent="0" marL="0">
+            <a:pPr marL="0" indent="0">
               <a:spcAft>
                 <a:spcPts val="400"/>
               </a:spcAft>
@@ -3591,7 +3287,7 @@
             <a:endParaRPr lang="en-US" sz="1400" dirty="0"/>
           </a:p>
           <a:p>
-            <a:pPr indent="0" marL="0">
+            <a:pPr marL="0" indent="0">
               <a:spcAft>
                 <a:spcPts val="400"/>
               </a:spcAft>
@@ -3611,7 +3307,7 @@
             <a:endParaRPr lang="en-US" sz="1400" dirty="0"/>
           </a:p>
           <a:p>
-            <a:pPr indent="0" marL="0">
+            <a:pPr marL="0" indent="0">
               <a:spcAft>
                 <a:spcPts val="400"/>
               </a:spcAft>
@@ -3653,7 +3349,7 @@
           <a:bodyPr wrap="square" rtlCol="0" anchor="ctr"/>
           <a:lstStyle/>
           <a:p>
-            <a:pPr algn="r" indent="0" marL="0">
+            <a:pPr marL="0" indent="0" algn="r">
               <a:buNone/>
             </a:pPr>
             <a:r>
@@ -3692,7 +3388,7 @@
           <a:bodyPr wrap="square" rtlCol="0" anchor="ctr"/>
           <a:lstStyle/>
           <a:p>
-            <a:pPr indent="0" marL="0">
+            <a:pPr marL="0" indent="0">
               <a:buNone/>
             </a:pPr>
             <a:r>
@@ -3726,6 +3422,7 @@
         <a:solidFill>
           <a:srgbClr val="FFFFFF"/>
         </a:solidFill>
+        <a:effectLst/>
       </p:bgPr>
     </p:bg>
     <p:spTree>
@@ -3763,11 +3460,11 @@
           <a:bodyPr wrap="square" rtlCol="0" anchor="ctr"/>
           <a:lstStyle/>
           <a:p>
-            <a:pPr indent="0" marL="0">
-              <a:buNone/>
-            </a:pPr>
-            <a:r>
-              <a:rPr lang="en-US" sz="1100" b="1" spc="600" kern="0" dirty="0">
+            <a:pPr marL="0" indent="0">
+              <a:buNone/>
+            </a:pPr>
+            <a:r>
+              <a:rPr lang="en-US" sz="1100" b="1" kern="0" spc="600" dirty="0">
                 <a:solidFill>
                   <a:srgbClr val="8C6810"/>
                 </a:solidFill>
@@ -3802,7 +3499,7 @@
           <a:bodyPr wrap="square" rtlCol="0" anchor="ctr"/>
           <a:lstStyle/>
           <a:p>
-            <a:pPr indent="0" marL="0">
+            <a:pPr marL="0" indent="0">
               <a:buNone/>
             </a:pPr>
             <a:r>
@@ -3841,7 +3538,7 @@
           <a:bodyPr wrap="square" rtlCol="0" anchor="ctr"/>
           <a:lstStyle/>
           <a:p>
-            <a:pPr indent="0" marL="0">
+            <a:pPr marL="0" indent="0">
               <a:buNone/>
             </a:pPr>
             <a:r>
@@ -3907,11 +3604,11 @@
           <a:bodyPr wrap="square" rtlCol="0" anchor="t"/>
           <a:lstStyle/>
           <a:p>
-            <a:pPr indent="0" marL="0">
-              <a:buNone/>
-            </a:pPr>
-            <a:r>
-              <a:rPr lang="en-US" sz="1100" b="1" spc="400" kern="0" dirty="0">
+            <a:pPr marL="0" indent="0">
+              <a:buNone/>
+            </a:pPr>
+            <a:r>
+              <a:rPr lang="en-US" sz="1100" b="1" kern="0" spc="400" dirty="0">
                 <a:solidFill>
                   <a:srgbClr val="8C6810"/>
                 </a:solidFill>
@@ -3925,7 +3622,7 @@
             <a:endParaRPr lang="en-US" sz="1100" dirty="0"/>
           </a:p>
           <a:p>
-            <a:pPr indent="0" marL="0">
+            <a:pPr marL="0" indent="0">
               <a:buNone/>
             </a:pPr>
             <a:r>
@@ -3943,7 +3640,7 @@
             <a:endParaRPr lang="en-US" sz="1100" dirty="0"/>
           </a:p>
           <a:p>
-            <a:pPr indent="0" marL="0">
+            <a:pPr marL="0" indent="0">
               <a:buNone/>
             </a:pPr>
             <a:r>
@@ -3961,7 +3658,7 @@
             <a:endParaRPr lang="en-US" sz="1100" dirty="0"/>
           </a:p>
           <a:p>
-            <a:pPr indent="0" marL="0">
+            <a:pPr marL="0" indent="0">
               <a:buNone/>
             </a:pPr>
             <a:r>
@@ -3975,9 +3672,6 @@
               </a:rPr>
               <a:t>He selects: </a:t>
             </a:r>
-            <a:pPr indent="0" marL="0">
-              <a:buNone/>
-            </a:pPr>
             <a:r>
               <a:rPr lang="en-US" sz="1300" b="1" dirty="0">
                 <a:solidFill>
@@ -4014,7 +3708,7 @@
           <a:bodyPr wrap="square" rtlCol="0" anchor="ctr"/>
           <a:lstStyle/>
           <a:p>
-            <a:pPr algn="ctr" indent="0" marL="0">
+            <a:pPr marL="0" indent="0" algn="ctr">
               <a:buNone/>
             </a:pPr>
             <a:r>
@@ -4053,7 +3747,7 @@
           <a:bodyPr wrap="square" rtlCol="0" anchor="ctr"/>
           <a:lstStyle/>
           <a:p>
-            <a:pPr algn="r" indent="0" marL="0">
+            <a:pPr marL="0" indent="0" algn="r">
               <a:buNone/>
             </a:pPr>
             <a:r>
@@ -4092,7 +3786,7 @@
           <a:bodyPr wrap="square" rtlCol="0" anchor="ctr"/>
           <a:lstStyle/>
           <a:p>
-            <a:pPr indent="0" marL="0">
+            <a:pPr marL="0" indent="0">
               <a:buNone/>
             </a:pPr>
             <a:r>
@@ -4126,6 +3820,7 @@
         <a:solidFill>
           <a:srgbClr val="FFFFFF"/>
         </a:solidFill>
+        <a:effectLst/>
       </p:bgPr>
     </p:bg>
     <p:spTree>
@@ -4163,11 +3858,11 @@
           <a:bodyPr wrap="square" rtlCol="0" anchor="ctr"/>
           <a:lstStyle/>
           <a:p>
-            <a:pPr indent="0" marL="0">
-              <a:buNone/>
-            </a:pPr>
-            <a:r>
-              <a:rPr lang="en-US" sz="1100" b="1" spc="600" kern="0" dirty="0">
+            <a:pPr marL="0" indent="0">
+              <a:buNone/>
+            </a:pPr>
+            <a:r>
+              <a:rPr lang="en-US" sz="1100" b="1" kern="0" spc="600" dirty="0">
                 <a:solidFill>
                   <a:srgbClr val="8C6810"/>
                 </a:solidFill>
@@ -4202,7 +3897,7 @@
           <a:bodyPr wrap="square" rtlCol="0" anchor="ctr"/>
           <a:lstStyle/>
           <a:p>
-            <a:pPr indent="0" marL="0">
+            <a:pPr marL="0" indent="0">
               <a:buNone/>
             </a:pPr>
             <a:r>
@@ -4241,7 +3936,7 @@
           <a:bodyPr wrap="square" rtlCol="0" anchor="ctr"/>
           <a:lstStyle/>
           <a:p>
-            <a:pPr indent="0" marL="0">
+            <a:pPr marL="0" indent="0">
               <a:buNone/>
             </a:pPr>
             <a:r>
@@ -4307,11 +4002,11 @@
           <a:bodyPr wrap="square" rtlCol="0" anchor="ctr"/>
           <a:lstStyle/>
           <a:p>
-            <a:pPr indent="0" marL="0">
-              <a:buNone/>
-            </a:pPr>
-            <a:r>
-              <a:rPr lang="en-US" sz="1000" b="1" spc="600" kern="0" dirty="0">
+            <a:pPr marL="0" indent="0">
+              <a:buNone/>
+            </a:pPr>
+            <a:r>
+              <a:rPr lang="en-US" sz="1000" b="1" kern="0" spc="600" dirty="0">
                 <a:solidFill>
                   <a:srgbClr val="DAA520"/>
                 </a:solidFill>
@@ -4343,7 +4038,7 @@
           <a:bodyPr wrap="square" rtlCol="0" anchor="ctr"/>
           <a:lstStyle/>
           <a:p>
-            <a:pPr algn="ctr" indent="0" marL="0">
+            <a:pPr marL="0" indent="0" algn="ctr">
               <a:buNone/>
             </a:pPr>
             <a:r>
@@ -4382,7 +4077,7 @@
           <a:bodyPr wrap="square" rtlCol="0" anchor="ctr"/>
           <a:lstStyle/>
           <a:p>
-            <a:pPr algn="ctr" indent="0" marL="0">
+            <a:pPr marL="0" indent="0" algn="ctr">
               <a:buNone/>
             </a:pPr>
             <a:r>
@@ -4418,7 +4113,7 @@
           <a:bodyPr wrap="square" rtlCol="0" anchor="ctr"/>
           <a:lstStyle/>
           <a:p>
-            <a:pPr indent="0" marL="0">
+            <a:pPr marL="0" indent="0">
               <a:buNone/>
             </a:pPr>
             <a:r>
@@ -4563,7 +4258,7 @@
           <a:bodyPr wrap="square" rtlCol="0" anchor="ctr"/>
           <a:lstStyle/>
           <a:p>
-            <a:pPr algn="ctr" indent="0" marL="0">
+            <a:pPr marL="0" indent="0" algn="ctr">
               <a:buNone/>
             </a:pPr>
             <a:r>
@@ -4602,7 +4297,7 @@
           <a:bodyPr wrap="square" rtlCol="0" anchor="ctr"/>
           <a:lstStyle/>
           <a:p>
-            <a:pPr algn="r" indent="0" marL="0">
+            <a:pPr marL="0" indent="0" algn="r">
               <a:buNone/>
             </a:pPr>
             <a:r>
@@ -4641,7 +4336,7 @@
           <a:bodyPr wrap="square" rtlCol="0" anchor="ctr"/>
           <a:lstStyle/>
           <a:p>
-            <a:pPr indent="0" marL="0">
+            <a:pPr marL="0" indent="0">
               <a:buNone/>
             </a:pPr>
             <a:r>
@@ -4675,6 +4370,7 @@
         <a:solidFill>
           <a:srgbClr val="FFFFFF"/>
         </a:solidFill>
+        <a:effectLst/>
       </p:bgPr>
     </p:bg>
     <p:spTree>
@@ -4712,11 +4408,11 @@
           <a:bodyPr wrap="square" rtlCol="0" anchor="ctr"/>
           <a:lstStyle/>
           <a:p>
-            <a:pPr indent="0" marL="0">
-              <a:buNone/>
-            </a:pPr>
-            <a:r>
-              <a:rPr lang="en-US" sz="1100" b="1" spc="600" kern="0" dirty="0">
+            <a:pPr marL="0" indent="0">
+              <a:buNone/>
+            </a:pPr>
+            <a:r>
+              <a:rPr lang="en-US" sz="1100" b="1" kern="0" spc="600" dirty="0">
                 <a:solidFill>
                   <a:srgbClr val="8C6810"/>
                 </a:solidFill>
@@ -4751,7 +4447,7 @@
           <a:bodyPr wrap="square" rtlCol="0" anchor="ctr"/>
           <a:lstStyle/>
           <a:p>
-            <a:pPr indent="0" marL="0">
+            <a:pPr marL="0" indent="0">
               <a:buNone/>
             </a:pPr>
             <a:r>
@@ -4815,7 +4511,7 @@
           <a:bodyPr wrap="square" rtlCol="0" anchor="ctr"/>
           <a:lstStyle/>
           <a:p>
-            <a:pPr algn="ctr" indent="0" marL="0">
+            <a:pPr marL="0" indent="0" algn="ctr">
               <a:buNone/>
             </a:pPr>
             <a:r>
@@ -4854,11 +4550,11 @@
           <a:bodyPr wrap="square" rtlCol="0" anchor="ctr"/>
           <a:lstStyle/>
           <a:p>
-            <a:pPr indent="0" marL="0">
-              <a:buNone/>
-            </a:pPr>
-            <a:r>
-              <a:rPr lang="en-US" sz="1100" b="1" spc="600" kern="0" dirty="0">
+            <a:pPr marL="0" indent="0">
+              <a:buNone/>
+            </a:pPr>
+            <a:r>
+              <a:rPr lang="en-US" sz="1100" b="1" kern="0" spc="600" dirty="0">
                 <a:solidFill>
                   <a:srgbClr val="8C6810"/>
                 </a:solidFill>
@@ -4893,7 +4589,7 @@
           <a:bodyPr wrap="square" rtlCol="0" anchor="ctr"/>
           <a:lstStyle/>
           <a:p>
-            <a:pPr indent="0" marL="0">
+            <a:pPr marL="0" indent="0">
               <a:buNone/>
             </a:pPr>
             <a:r>
@@ -4932,7 +4628,7 @@
           <a:bodyPr wrap="square" rtlCol="0" anchor="ctr"/>
           <a:lstStyle/>
           <a:p>
-            <a:pPr indent="0" marL="0">
+            <a:pPr marL="0" indent="0">
               <a:buNone/>
             </a:pPr>
             <a:r>
@@ -4996,7 +4692,7 @@
           <a:bodyPr wrap="square" rtlCol="0" anchor="ctr"/>
           <a:lstStyle/>
           <a:p>
-            <a:pPr algn="ctr" indent="0" marL="0">
+            <a:pPr marL="0" indent="0" algn="ctr">
               <a:buNone/>
             </a:pPr>
             <a:r>
@@ -5035,11 +4731,11 @@
           <a:bodyPr wrap="square" rtlCol="0" anchor="ctr"/>
           <a:lstStyle/>
           <a:p>
-            <a:pPr indent="0" marL="0">
-              <a:buNone/>
-            </a:pPr>
-            <a:r>
-              <a:rPr lang="en-US" sz="1100" b="1" spc="600" kern="0" dirty="0">
+            <a:pPr marL="0" indent="0">
+              <a:buNone/>
+            </a:pPr>
+            <a:r>
+              <a:rPr lang="en-US" sz="1100" b="1" kern="0" spc="600" dirty="0">
                 <a:solidFill>
                   <a:srgbClr val="8C6810"/>
                 </a:solidFill>
@@ -5074,7 +4770,7 @@
           <a:bodyPr wrap="square" rtlCol="0" anchor="ctr"/>
           <a:lstStyle/>
           <a:p>
-            <a:pPr indent="0" marL="0">
+            <a:pPr marL="0" indent="0">
               <a:buNone/>
             </a:pPr>
             <a:r>
@@ -5113,7 +4809,7 @@
           <a:bodyPr wrap="square" rtlCol="0" anchor="ctr"/>
           <a:lstStyle/>
           <a:p>
-            <a:pPr indent="0" marL="0">
+            <a:pPr marL="0" indent="0">
               <a:buNone/>
             </a:pPr>
             <a:r>
@@ -5177,7 +4873,7 @@
           <a:bodyPr wrap="square" rtlCol="0" anchor="ctr"/>
           <a:lstStyle/>
           <a:p>
-            <a:pPr algn="ctr" indent="0" marL="0">
+            <a:pPr marL="0" indent="0" algn="ctr">
               <a:buNone/>
             </a:pPr>
             <a:r>
@@ -5216,11 +4912,11 @@
           <a:bodyPr wrap="square" rtlCol="0" anchor="ctr"/>
           <a:lstStyle/>
           <a:p>
-            <a:pPr indent="0" marL="0">
-              <a:buNone/>
-            </a:pPr>
-            <a:r>
-              <a:rPr lang="en-US" sz="1100" b="1" spc="600" kern="0" dirty="0">
+            <a:pPr marL="0" indent="0">
+              <a:buNone/>
+            </a:pPr>
+            <a:r>
+              <a:rPr lang="en-US" sz="1100" b="1" kern="0" spc="600" dirty="0">
                 <a:solidFill>
                   <a:srgbClr val="8C6810"/>
                 </a:solidFill>
@@ -5255,7 +4951,7 @@
           <a:bodyPr wrap="square" rtlCol="0" anchor="ctr"/>
           <a:lstStyle/>
           <a:p>
-            <a:pPr indent="0" marL="0">
+            <a:pPr marL="0" indent="0">
               <a:buNone/>
             </a:pPr>
             <a:r>
@@ -5294,7 +4990,7 @@
           <a:bodyPr wrap="square" rtlCol="0" anchor="ctr"/>
           <a:lstStyle/>
           <a:p>
-            <a:pPr indent="0" marL="0">
+            <a:pPr marL="0" indent="0">
               <a:buNone/>
             </a:pPr>
             <a:r>
@@ -5333,7 +5029,7 @@
           <a:bodyPr wrap="square" rtlCol="0" anchor="ctr"/>
           <a:lstStyle/>
           <a:p>
-            <a:pPr algn="r" indent="0" marL="0">
+            <a:pPr marL="0" indent="0" algn="r">
               <a:buNone/>
             </a:pPr>
             <a:r>
@@ -5372,7 +5068,7 @@
           <a:bodyPr wrap="square" rtlCol="0" anchor="ctr"/>
           <a:lstStyle/>
           <a:p>
-            <a:pPr indent="0" marL="0">
+            <a:pPr marL="0" indent="0">
               <a:buNone/>
             </a:pPr>
             <a:r>
@@ -5406,6 +5102,7 @@
         <a:solidFill>
           <a:srgbClr val="FFFFFF"/>
         </a:solidFill>
+        <a:effectLst/>
       </p:bgPr>
     </p:bg>
     <p:spTree>
@@ -5443,11 +5140,11 @@
           <a:bodyPr wrap="square" rtlCol="0" anchor="ctr"/>
           <a:lstStyle/>
           <a:p>
-            <a:pPr indent="0" marL="0">
-              <a:buNone/>
-            </a:pPr>
-            <a:r>
-              <a:rPr lang="en-US" sz="1100" b="1" spc="600" kern="0" dirty="0">
+            <a:pPr marL="0" indent="0">
+              <a:buNone/>
+            </a:pPr>
+            <a:r>
+              <a:rPr lang="en-US" sz="1100" b="1" kern="0" spc="600" dirty="0">
                 <a:solidFill>
                   <a:srgbClr val="8C6810"/>
                 </a:solidFill>
@@ -5482,7 +5179,7 @@
           <a:bodyPr wrap="square" rtlCol="0" anchor="ctr"/>
           <a:lstStyle/>
           <a:p>
-            <a:pPr indent="0" marL="0">
+            <a:pPr marL="0" indent="0">
               <a:buNone/>
             </a:pPr>
             <a:r>
@@ -5521,7 +5218,7 @@
           <a:bodyPr wrap="square" rtlCol="0" anchor="ctr"/>
           <a:lstStyle/>
           <a:p>
-            <a:pPr indent="0" marL="0">
+            <a:pPr marL="0" indent="0">
               <a:buNone/>
             </a:pPr>
             <a:r>
@@ -5614,7 +5311,7 @@
           <a:bodyPr wrap="square" rtlCol="0" anchor="ctr"/>
           <a:lstStyle/>
           <a:p>
-            <a:pPr indent="0" marL="0">
+            <a:pPr marL="0" indent="0">
               <a:buNone/>
             </a:pPr>
             <a:r>
@@ -5653,7 +5350,7 @@
           <a:bodyPr wrap="square" rtlCol="0" anchor="ctr"/>
           <a:lstStyle/>
           <a:p>
-            <a:pPr indent="0" marL="0">
+            <a:pPr marL="0" indent="0">
               <a:buNone/>
             </a:pPr>
             <a:r>
@@ -5746,7 +5443,7 @@
           <a:bodyPr wrap="square" rtlCol="0" anchor="ctr"/>
           <a:lstStyle/>
           <a:p>
-            <a:pPr indent="0" marL="0">
+            <a:pPr marL="0" indent="0">
               <a:buNone/>
             </a:pPr>
             <a:r>
@@ -5785,7 +5482,7 @@
           <a:bodyPr wrap="square" rtlCol="0" anchor="ctr"/>
           <a:lstStyle/>
           <a:p>
-            <a:pPr indent="0" marL="0">
+            <a:pPr marL="0" indent="0">
               <a:buNone/>
             </a:pPr>
             <a:r>
@@ -5878,7 +5575,7 @@
           <a:bodyPr wrap="square" rtlCol="0" anchor="ctr"/>
           <a:lstStyle/>
           <a:p>
-            <a:pPr indent="0" marL="0">
+            <a:pPr marL="0" indent="0">
               <a:buNone/>
             </a:pPr>
             <a:r>
@@ -5917,7 +5614,7 @@
           <a:bodyPr wrap="square" rtlCol="0" anchor="ctr"/>
           <a:lstStyle/>
           <a:p>
-            <a:pPr indent="0" marL="0">
+            <a:pPr marL="0" indent="0">
               <a:buNone/>
             </a:pPr>
             <a:r>
@@ -6010,7 +5707,7 @@
           <a:bodyPr wrap="square" rtlCol="0" anchor="ctr"/>
           <a:lstStyle/>
           <a:p>
-            <a:pPr indent="0" marL="0">
+            <a:pPr marL="0" indent="0">
               <a:buNone/>
             </a:pPr>
             <a:r>
@@ -6049,7 +5746,7 @@
           <a:bodyPr wrap="square" rtlCol="0" anchor="ctr"/>
           <a:lstStyle/>
           <a:p>
-            <a:pPr indent="0" marL="0">
+            <a:pPr marL="0" indent="0">
               <a:buNone/>
             </a:pPr>
             <a:r>
@@ -6142,7 +5839,7 @@
           <a:bodyPr wrap="square" rtlCol="0" anchor="ctr"/>
           <a:lstStyle/>
           <a:p>
-            <a:pPr indent="0" marL="0">
+            <a:pPr marL="0" indent="0">
               <a:buNone/>
             </a:pPr>
             <a:r>
@@ -6181,7 +5878,7 @@
           <a:bodyPr wrap="square" rtlCol="0" anchor="ctr"/>
           <a:lstStyle/>
           <a:p>
-            <a:pPr indent="0" marL="0">
+            <a:pPr marL="0" indent="0">
               <a:buNone/>
             </a:pPr>
             <a:r>
@@ -6195,9 +5892,6 @@
               </a:rPr>
               <a:t>Day 90: </a:t>
             </a:r>
-            <a:pPr indent="0" marL="0">
-              <a:buNone/>
-            </a:pPr>
             <a:r>
               <a:rPr lang="en-US" sz="1300" i="1" dirty="0">
                 <a:solidFill>
@@ -6234,7 +5928,7 @@
           <a:bodyPr wrap="square" rtlCol="0" anchor="ctr"/>
           <a:lstStyle/>
           <a:p>
-            <a:pPr algn="r" indent="0" marL="0">
+            <a:pPr marL="0" indent="0" algn="r">
               <a:buNone/>
             </a:pPr>
             <a:r>
@@ -6273,7 +5967,7 @@
           <a:bodyPr wrap="square" rtlCol="0" anchor="ctr"/>
           <a:lstStyle/>
           <a:p>
-            <a:pPr indent="0" marL="0">
+            <a:pPr marL="0" indent="0">
               <a:buNone/>
             </a:pPr>
             <a:r>
@@ -6307,6 +6001,7 @@
         <a:solidFill>
           <a:srgbClr val="0E0E0E"/>
         </a:solidFill>
+        <a:effectLst/>
       </p:bgPr>
     </p:bg>
     <p:spTree>
@@ -6344,11 +6039,11 @@
           <a:bodyPr wrap="square" rtlCol="0" anchor="ctr"/>
           <a:lstStyle/>
           <a:p>
-            <a:pPr indent="0" marL="0">
-              <a:buNone/>
-            </a:pPr>
-            <a:r>
-              <a:rPr lang="en-US" sz="1100" b="1" spc="600" kern="0" dirty="0">
+            <a:pPr marL="0" indent="0">
+              <a:buNone/>
+            </a:pPr>
+            <a:r>
+              <a:rPr lang="en-US" sz="1100" b="1" kern="0" spc="600" dirty="0">
                 <a:solidFill>
                   <a:srgbClr val="DAA520"/>
                 </a:solidFill>
@@ -6383,7 +6078,7 @@
           <a:bodyPr wrap="square" rtlCol="0" anchor="ctr"/>
           <a:lstStyle/>
           <a:p>
-            <a:pPr indent="0" marL="0">
+            <a:pPr marL="0" indent="0">
               <a:buNone/>
             </a:pPr>
             <a:r>
@@ -6447,7 +6142,7 @@
           <a:bodyPr wrap="square" rtlCol="0" anchor="ctr"/>
           <a:lstStyle/>
           <a:p>
-            <a:pPr algn="ctr" indent="0" marL="0">
+            <a:pPr marL="0" indent="0" algn="ctr">
               <a:buNone/>
             </a:pPr>
             <a:r>
@@ -6483,7 +6178,7 @@
           <a:bodyPr wrap="square" rtlCol="0" anchor="ctr"/>
           <a:lstStyle/>
           <a:p>
-            <a:pPr indent="0" marL="0">
+            <a:pPr marL="0" indent="0">
               <a:buNone/>
             </a:pPr>
             <a:r>
@@ -6522,7 +6217,7 @@
           <a:bodyPr wrap="square" rtlCol="0" anchor="ctr"/>
           <a:lstStyle/>
           <a:p>
-            <a:pPr indent="0" marL="0">
+            <a:pPr marL="0" indent="0">
               <a:buNone/>
             </a:pPr>
             <a:r>
@@ -6586,7 +6281,7 @@
           <a:bodyPr wrap="square" rtlCol="0" anchor="ctr"/>
           <a:lstStyle/>
           <a:p>
-            <a:pPr algn="ctr" indent="0" marL="0">
+            <a:pPr marL="0" indent="0" algn="ctr">
               <a:buNone/>
             </a:pPr>
             <a:r>
@@ -6622,7 +6317,7 @@
           <a:bodyPr wrap="square" rtlCol="0" anchor="ctr"/>
           <a:lstStyle/>
           <a:p>
-            <a:pPr indent="0" marL="0">
+            <a:pPr marL="0" indent="0">
               <a:buNone/>
             </a:pPr>
             <a:r>
@@ -6661,7 +6356,7 @@
           <a:bodyPr wrap="square" rtlCol="0" anchor="ctr"/>
           <a:lstStyle/>
           <a:p>
-            <a:pPr indent="0" marL="0">
+            <a:pPr marL="0" indent="0">
               <a:buNone/>
             </a:pPr>
             <a:r>
@@ -6725,7 +6420,7 @@
           <a:bodyPr wrap="square" rtlCol="0" anchor="ctr"/>
           <a:lstStyle/>
           <a:p>
-            <a:pPr algn="ctr" indent="0" marL="0">
+            <a:pPr marL="0" indent="0" algn="ctr">
               <a:buNone/>
             </a:pPr>
             <a:r>
@@ -6761,7 +6456,7 @@
           <a:bodyPr wrap="square" rtlCol="0" anchor="ctr"/>
           <a:lstStyle/>
           <a:p>
-            <a:pPr indent="0" marL="0">
+            <a:pPr marL="0" indent="0">
               <a:buNone/>
             </a:pPr>
             <a:r>
@@ -6800,7 +6495,7 @@
           <a:bodyPr wrap="square" rtlCol="0" anchor="ctr"/>
           <a:lstStyle/>
           <a:p>
-            <a:pPr indent="0" marL="0">
+            <a:pPr marL="0" indent="0">
               <a:buNone/>
             </a:pPr>
             <a:r>
@@ -6864,7 +6559,7 @@
           <a:bodyPr wrap="square" rtlCol="0" anchor="ctr"/>
           <a:lstStyle/>
           <a:p>
-            <a:pPr algn="ctr" indent="0" marL="0">
+            <a:pPr marL="0" indent="0" algn="ctr">
               <a:buNone/>
             </a:pPr>
             <a:r>
@@ -6900,7 +6595,7 @@
           <a:bodyPr wrap="square" rtlCol="0" anchor="ctr"/>
           <a:lstStyle/>
           <a:p>
-            <a:pPr indent="0" marL="0">
+            <a:pPr marL="0" indent="0">
               <a:buNone/>
             </a:pPr>
             <a:r>
@@ -6939,7 +6634,7 @@
           <a:bodyPr wrap="square" rtlCol="0" anchor="ctr"/>
           <a:lstStyle/>
           <a:p>
-            <a:pPr indent="0" marL="0">
+            <a:pPr marL="0" indent="0">
               <a:buNone/>
             </a:pPr>
             <a:r>
@@ -6978,7 +6673,7 @@
           <a:bodyPr wrap="square" rtlCol="0" anchor="ctr"/>
           <a:lstStyle/>
           <a:p>
-            <a:pPr algn="r" indent="0" marL="0">
+            <a:pPr marL="0" indent="0" algn="r">
               <a:buNone/>
             </a:pPr>
             <a:r>
@@ -7017,7 +6712,7 @@
           <a:bodyPr wrap="square" rtlCol="0" anchor="ctr"/>
           <a:lstStyle/>
           <a:p>
-            <a:pPr indent="0" marL="0">
+            <a:pPr marL="0" indent="0">
               <a:buNone/>
             </a:pPr>
             <a:r>
@@ -7051,6 +6746,7 @@
         <a:solidFill>
           <a:srgbClr val="FFFFFF"/>
         </a:solidFill>
+        <a:effectLst/>
       </p:bgPr>
     </p:bg>
     <p:spTree>
@@ -7088,11 +6784,11 @@
           <a:bodyPr wrap="square" rtlCol="0" anchor="ctr"/>
           <a:lstStyle/>
           <a:p>
-            <a:pPr indent="0" marL="0">
-              <a:buNone/>
-            </a:pPr>
-            <a:r>
-              <a:rPr lang="en-US" sz="1100" b="1" spc="600" kern="0" dirty="0">
+            <a:pPr marL="0" indent="0">
+              <a:buNone/>
+            </a:pPr>
+            <a:r>
+              <a:rPr lang="en-US" sz="1100" b="1" kern="0" spc="600" dirty="0">
                 <a:solidFill>
                   <a:srgbClr val="8C6810"/>
                 </a:solidFill>
@@ -7127,7 +6823,7 @@
           <a:bodyPr wrap="square" rtlCol="0" anchor="ctr"/>
           <a:lstStyle/>
           <a:p>
-            <a:pPr indent="0" marL="0">
+            <a:pPr marL="0" indent="0">
               <a:buNone/>
             </a:pPr>
             <a:r>
@@ -7193,7 +6889,7 @@
           <a:bodyPr wrap="square" rtlCol="0" anchor="ctr"/>
           <a:lstStyle/>
           <a:p>
-            <a:pPr indent="0" marL="0">
+            <a:pPr marL="0" indent="0">
               <a:buNone/>
             </a:pPr>
             <a:r>
@@ -7386,7 +7082,7 @@
           <a:bodyPr wrap="square" rtlCol="0" anchor="ctr"/>
           <a:lstStyle/>
           <a:p>
-            <a:pPr indent="0" marL="0">
+            <a:pPr marL="0" indent="0">
               <a:buNone/>
             </a:pPr>
             <a:r>
@@ -7552,7 +7248,7 @@
           <a:bodyPr wrap="square" rtlCol="0" anchor="ctr"/>
           <a:lstStyle/>
           <a:p>
-            <a:pPr algn="ctr" indent="0" marL="0">
+            <a:pPr marL="0" indent="0" algn="ctr">
               <a:buNone/>
             </a:pPr>
             <a:r>
@@ -7591,7 +7287,7 @@
           <a:bodyPr wrap="square" rtlCol="0" anchor="ctr"/>
           <a:lstStyle/>
           <a:p>
-            <a:pPr algn="r" indent="0" marL="0">
+            <a:pPr marL="0" indent="0" algn="r">
               <a:buNone/>
             </a:pPr>
             <a:r>
@@ -7630,7 +7326,7 @@
           <a:bodyPr wrap="square" rtlCol="0" anchor="ctr"/>
           <a:lstStyle/>
           <a:p>
-            <a:pPr indent="0" marL="0">
+            <a:pPr marL="0" indent="0">
               <a:buNone/>
             </a:pPr>
             <a:r>
@@ -7664,6 +7360,7 @@
         <a:solidFill>
           <a:srgbClr val="FFFFFF"/>
         </a:solidFill>
+        <a:effectLst/>
       </p:bgPr>
     </p:bg>
     <p:spTree>
@@ -7701,11 +7398,11 @@
           <a:bodyPr wrap="square" rtlCol="0" anchor="ctr"/>
           <a:lstStyle/>
           <a:p>
-            <a:pPr indent="0" marL="0">
-              <a:buNone/>
-            </a:pPr>
-            <a:r>
-              <a:rPr lang="en-US" sz="1100" b="1" spc="600" kern="0" dirty="0">
+            <a:pPr marL="0" indent="0">
+              <a:buNone/>
+            </a:pPr>
+            <a:r>
+              <a:rPr lang="en-US" sz="1100" b="1" kern="0" spc="600" dirty="0">
                 <a:solidFill>
                   <a:srgbClr val="8C6810"/>
                 </a:solidFill>
@@ -7740,7 +7437,7 @@
           <a:bodyPr wrap="square" rtlCol="0" anchor="ctr"/>
           <a:lstStyle/>
           <a:p>
-            <a:pPr indent="0" marL="0">
+            <a:pPr marL="0" indent="0">
               <a:buNone/>
             </a:pPr>
             <a:r>
@@ -7779,7 +7476,7 @@
           <a:bodyPr wrap="square" rtlCol="0" anchor="ctr"/>
           <a:lstStyle/>
           <a:p>
-            <a:pPr indent="0" marL="0">
+            <a:pPr marL="0" indent="0">
               <a:buNone/>
             </a:pPr>
             <a:r>
@@ -8113,7 +7810,7 @@
           <a:bodyPr wrap="square" rtlCol="0" anchor="ctr"/>
           <a:lstStyle/>
           <a:p>
-            <a:pPr indent="0" marL="0">
+            <a:pPr marL="0" indent="0">
               <a:buNone/>
             </a:pPr>
             <a:r>
@@ -8258,7 +7955,7 @@
           <a:bodyPr wrap="square" rtlCol="0" anchor="ctr"/>
           <a:lstStyle/>
           <a:p>
-            <a:pPr algn="r" indent="0" marL="0">
+            <a:pPr marL="0" indent="0" algn="r">
               <a:buNone/>
             </a:pPr>
             <a:r>
@@ -8297,7 +7994,7 @@
           <a:bodyPr wrap="square" rtlCol="0" anchor="ctr"/>
           <a:lstStyle/>
           <a:p>
-            <a:pPr indent="0" marL="0">
+            <a:pPr marL="0" indent="0">
               <a:buNone/>
             </a:pPr>
             <a:r>
@@ -8331,6 +8028,7 @@
         <a:solidFill>
           <a:srgbClr val="0E0E0E"/>
         </a:solidFill>
+        <a:effectLst/>
       </p:bgPr>
     </p:bg>
     <p:spTree>
@@ -8368,11 +8066,11 @@
           <a:bodyPr wrap="square" rtlCol="0" anchor="ctr"/>
           <a:lstStyle/>
           <a:p>
-            <a:pPr indent="0" marL="0">
-              <a:buNone/>
-            </a:pPr>
-            <a:r>
-              <a:rPr lang="en-US" sz="1100" b="1" spc="600" kern="0" dirty="0">
+            <a:pPr marL="0" indent="0">
+              <a:buNone/>
+            </a:pPr>
+            <a:r>
+              <a:rPr lang="en-US" sz="1100" b="1" kern="0" spc="600" dirty="0">
                 <a:solidFill>
                   <a:srgbClr val="DAA520"/>
                 </a:solidFill>
@@ -8407,7 +8105,7 @@
           <a:bodyPr wrap="square" rtlCol="0" anchor="ctr"/>
           <a:lstStyle/>
           <a:p>
-            <a:pPr indent="0" marL="0">
+            <a:pPr marL="0" indent="0">
               <a:buNone/>
             </a:pPr>
             <a:r>
@@ -8473,7 +8171,7 @@
           <a:bodyPr wrap="square" rtlCol="0" anchor="ctr"/>
           <a:lstStyle/>
           <a:p>
-            <a:pPr algn="ctr" indent="0" marL="0">
+            <a:pPr marL="0" indent="0" algn="ctr">
               <a:buNone/>
             </a:pPr>
             <a:r>
@@ -8509,7 +8207,7 @@
           <a:bodyPr wrap="square" rtlCol="0" anchor="ctr"/>
           <a:lstStyle/>
           <a:p>
-            <a:pPr algn="ctr" indent="0" marL="0">
+            <a:pPr marL="0" indent="0" algn="ctr">
               <a:buNone/>
             </a:pPr>
             <a:r>
@@ -8548,7 +8246,7 @@
           <a:bodyPr wrap="square" rtlCol="0" anchor="ctr"/>
           <a:lstStyle/>
           <a:p>
-            <a:pPr algn="ctr" indent="0" marL="0">
+            <a:pPr marL="0" indent="0" algn="ctr">
               <a:buNone/>
             </a:pPr>
             <a:r>
@@ -8614,7 +8312,7 @@
           <a:bodyPr wrap="square" rtlCol="0" anchor="ctr"/>
           <a:lstStyle/>
           <a:p>
-            <a:pPr algn="ctr" indent="0" marL="0">
+            <a:pPr marL="0" indent="0" algn="ctr">
               <a:buNone/>
             </a:pPr>
             <a:r>
@@ -8650,7 +8348,7 @@
           <a:bodyPr wrap="square" rtlCol="0" anchor="ctr"/>
           <a:lstStyle/>
           <a:p>
-            <a:pPr algn="ctr" indent="0" marL="0">
+            <a:pPr marL="0" indent="0" algn="ctr">
               <a:buNone/>
             </a:pPr>
             <a:r>
@@ -8689,7 +8387,7 @@
           <a:bodyPr wrap="square" rtlCol="0" anchor="ctr"/>
           <a:lstStyle/>
           <a:p>
-            <a:pPr algn="ctr" indent="0" marL="0">
+            <a:pPr marL="0" indent="0" algn="ctr">
               <a:buNone/>
             </a:pPr>
             <a:r>
@@ -8755,7 +8453,7 @@
           <a:bodyPr wrap="square" rtlCol="0" anchor="ctr"/>
           <a:lstStyle/>
           <a:p>
-            <a:pPr algn="ctr" indent="0" marL="0">
+            <a:pPr marL="0" indent="0" algn="ctr">
               <a:buNone/>
             </a:pPr>
             <a:r>
@@ -8791,7 +8489,7 @@
           <a:bodyPr wrap="square" rtlCol="0" anchor="ctr"/>
           <a:lstStyle/>
           <a:p>
-            <a:pPr algn="ctr" indent="0" marL="0">
+            <a:pPr marL="0" indent="0" algn="ctr">
               <a:buNone/>
             </a:pPr>
             <a:r>
@@ -8830,7 +8528,7 @@
           <a:bodyPr wrap="square" rtlCol="0" anchor="ctr"/>
           <a:lstStyle/>
           <a:p>
-            <a:pPr algn="ctr" indent="0" marL="0">
+            <a:pPr marL="0" indent="0" algn="ctr">
               <a:buNone/>
             </a:pPr>
             <a:r>
@@ -8869,7 +8567,7 @@
           <a:bodyPr wrap="square" rtlCol="0" anchor="ctr"/>
           <a:lstStyle/>
           <a:p>
-            <a:pPr algn="ctr" indent="0" marL="0">
+            <a:pPr marL="0" indent="0" algn="ctr">
               <a:buNone/>
             </a:pPr>
             <a:r>
@@ -8883,9 +8581,6 @@
               </a:rPr>
               <a:t>Then: </a:t>
             </a:r>
-            <a:pPr algn="ctr" indent="0" marL="0">
-              <a:buNone/>
-            </a:pPr>
             <a:r>
               <a:rPr lang="en-US" sz="1300" i="1" dirty="0">
                 <a:solidFill>
@@ -8922,7 +8617,7 @@
           <a:bodyPr wrap="square" rtlCol="0" anchor="ctr"/>
           <a:lstStyle/>
           <a:p>
-            <a:pPr algn="ctr" indent="0" marL="0">
+            <a:pPr marL="0" indent="0" algn="ctr">
               <a:buNone/>
             </a:pPr>
             <a:r>
@@ -8961,7 +8656,7 @@
           <a:bodyPr wrap="square" rtlCol="0" anchor="ctr"/>
           <a:lstStyle/>
           <a:p>
-            <a:pPr algn="r" indent="0" marL="0">
+            <a:pPr marL="0" indent="0" algn="r">
               <a:buNone/>
             </a:pPr>
             <a:r>
@@ -9000,7 +8695,7 @@
           <a:bodyPr wrap="square" rtlCol="0" anchor="ctr"/>
           <a:lstStyle/>
           <a:p>
-            <a:pPr indent="0" marL="0">
+            <a:pPr marL="0" indent="0">
               <a:buNone/>
             </a:pPr>
             <a:r>
@@ -9034,6 +8729,7 @@
         <a:solidFill>
           <a:srgbClr val="FFFFFF"/>
         </a:solidFill>
+        <a:effectLst/>
       </p:bgPr>
     </p:bg>
     <p:spTree>
@@ -9071,11 +8767,11 @@
           <a:bodyPr wrap="square" rtlCol="0" anchor="ctr"/>
           <a:lstStyle/>
           <a:p>
-            <a:pPr indent="0" marL="0">
-              <a:buNone/>
-            </a:pPr>
-            <a:r>
-              <a:rPr lang="en-US" sz="1100" b="1" spc="600" kern="0" dirty="0">
+            <a:pPr marL="0" indent="0">
+              <a:buNone/>
+            </a:pPr>
+            <a:r>
+              <a:rPr lang="en-US" sz="1100" b="1" kern="0" spc="600" dirty="0">
                 <a:solidFill>
                   <a:srgbClr val="8C6810"/>
                 </a:solidFill>
@@ -9110,7 +8806,7 @@
           <a:bodyPr wrap="square" rtlCol="0" anchor="ctr"/>
           <a:lstStyle/>
           <a:p>
-            <a:pPr indent="0" marL="0">
+            <a:pPr marL="0" indent="0">
               <a:buNone/>
             </a:pPr>
             <a:r>
@@ -9174,7 +8870,7 @@
           <a:bodyPr wrap="square" rtlCol="0" anchor="ctr"/>
           <a:lstStyle/>
           <a:p>
-            <a:pPr algn="ctr" indent="0" marL="0">
+            <a:pPr marL="0" indent="0" algn="ctr">
               <a:buNone/>
             </a:pPr>
             <a:r>
@@ -9210,7 +8906,7 @@
           <a:bodyPr wrap="square" rtlCol="0" anchor="ctr"/>
           <a:lstStyle/>
           <a:p>
-            <a:pPr indent="0" marL="0">
+            <a:pPr marL="0" indent="0">
               <a:buNone/>
             </a:pPr>
             <a:r>
@@ -9249,7 +8945,7 @@
           <a:bodyPr wrap="square" rtlCol="0" anchor="ctr"/>
           <a:lstStyle/>
           <a:p>
-            <a:pPr indent="0" marL="0">
+            <a:pPr marL="0" indent="0">
               <a:buNone/>
             </a:pPr>
             <a:r>
@@ -9313,7 +9009,7 @@
           <a:bodyPr wrap="square" rtlCol="0" anchor="ctr"/>
           <a:lstStyle/>
           <a:p>
-            <a:pPr algn="ctr" indent="0" marL="0">
+            <a:pPr marL="0" indent="0" algn="ctr">
               <a:buNone/>
             </a:pPr>
             <a:r>
@@ -9349,7 +9045,7 @@
           <a:bodyPr wrap="square" rtlCol="0" anchor="ctr"/>
           <a:lstStyle/>
           <a:p>
-            <a:pPr indent="0" marL="0">
+            <a:pPr marL="0" indent="0">
               <a:buNone/>
             </a:pPr>
             <a:r>
@@ -9388,7 +9084,7 @@
           <a:bodyPr wrap="square" rtlCol="0" anchor="ctr"/>
           <a:lstStyle/>
           <a:p>
-            <a:pPr indent="0" marL="0">
+            <a:pPr marL="0" indent="0">
               <a:buNone/>
             </a:pPr>
             <a:r>
@@ -9452,7 +9148,7 @@
           <a:bodyPr wrap="square" rtlCol="0" anchor="ctr"/>
           <a:lstStyle/>
           <a:p>
-            <a:pPr algn="ctr" indent="0" marL="0">
+            <a:pPr marL="0" indent="0" algn="ctr">
               <a:buNone/>
             </a:pPr>
             <a:r>
@@ -9488,7 +9184,7 @@
           <a:bodyPr wrap="square" rtlCol="0" anchor="ctr"/>
           <a:lstStyle/>
           <a:p>
-            <a:pPr indent="0" marL="0">
+            <a:pPr marL="0" indent="0">
               <a:buNone/>
             </a:pPr>
             <a:r>
@@ -9527,7 +9223,7 @@
           <a:bodyPr wrap="square" rtlCol="0" anchor="ctr"/>
           <a:lstStyle/>
           <a:p>
-            <a:pPr indent="0" marL="0">
+            <a:pPr marL="0" indent="0">
               <a:buNone/>
             </a:pPr>
             <a:r>
@@ -9591,7 +9287,7 @@
           <a:bodyPr wrap="square" rtlCol="0" anchor="ctr"/>
           <a:lstStyle/>
           <a:p>
-            <a:pPr algn="ctr" indent="0" marL="0">
+            <a:pPr marL="0" indent="0" algn="ctr">
               <a:buNone/>
             </a:pPr>
             <a:r>
@@ -9627,7 +9323,7 @@
           <a:bodyPr wrap="square" rtlCol="0" anchor="ctr"/>
           <a:lstStyle/>
           <a:p>
-            <a:pPr indent="0" marL="0">
+            <a:pPr marL="0" indent="0">
               <a:buNone/>
             </a:pPr>
             <a:r>
@@ -9666,7 +9362,7 @@
           <a:bodyPr wrap="square" rtlCol="0" anchor="ctr"/>
           <a:lstStyle/>
           <a:p>
-            <a:pPr indent="0" marL="0">
+            <a:pPr marL="0" indent="0">
               <a:buNone/>
             </a:pPr>
             <a:r>
@@ -9730,7 +9426,7 @@
           <a:bodyPr wrap="square" rtlCol="0" anchor="ctr"/>
           <a:lstStyle/>
           <a:p>
-            <a:pPr algn="ctr" indent="0" marL="0">
+            <a:pPr marL="0" indent="0" algn="ctr">
               <a:buNone/>
             </a:pPr>
             <a:r>
@@ -9766,7 +9462,7 @@
           <a:bodyPr wrap="square" rtlCol="0" anchor="ctr"/>
           <a:lstStyle/>
           <a:p>
-            <a:pPr indent="0" marL="0">
+            <a:pPr marL="0" indent="0">
               <a:buNone/>
             </a:pPr>
             <a:r>
@@ -9805,7 +9501,7 @@
           <a:bodyPr wrap="square" rtlCol="0" anchor="ctr"/>
           <a:lstStyle/>
           <a:p>
-            <a:pPr indent="0" marL="0">
+            <a:pPr marL="0" indent="0">
               <a:buNone/>
             </a:pPr>
             <a:r>
@@ -9869,7 +9565,7 @@
           <a:bodyPr wrap="square" rtlCol="0" anchor="ctr"/>
           <a:lstStyle/>
           <a:p>
-            <a:pPr algn="ctr" indent="0" marL="0">
+            <a:pPr marL="0" indent="0" algn="ctr">
               <a:buNone/>
             </a:pPr>
             <a:r>
@@ -9905,7 +9601,7 @@
           <a:bodyPr wrap="square" rtlCol="0" anchor="ctr"/>
           <a:lstStyle/>
           <a:p>
-            <a:pPr indent="0" marL="0">
+            <a:pPr marL="0" indent="0">
               <a:buNone/>
             </a:pPr>
             <a:r>
@@ -9944,7 +9640,7 @@
           <a:bodyPr wrap="square" rtlCol="0" anchor="ctr"/>
           <a:lstStyle/>
           <a:p>
-            <a:pPr indent="0" marL="0">
+            <a:pPr marL="0" indent="0">
               <a:buNone/>
             </a:pPr>
             <a:r>
@@ -9983,7 +9679,7 @@
           <a:bodyPr wrap="square" rtlCol="0" anchor="ctr"/>
           <a:lstStyle/>
           <a:p>
-            <a:pPr algn="r" indent="0" marL="0">
+            <a:pPr marL="0" indent="0" algn="r">
               <a:buNone/>
             </a:pPr>
             <a:r>
@@ -10022,7 +9718,7 @@
           <a:bodyPr wrap="square" rtlCol="0" anchor="ctr"/>
           <a:lstStyle/>
           <a:p>
-            <a:pPr indent="0" marL="0">
+            <a:pPr marL="0" indent="0">
               <a:buNone/>
             </a:pPr>
             <a:r>
@@ -10056,6 +9752,7 @@
         <a:solidFill>
           <a:srgbClr val="FFFFFF"/>
         </a:solidFill>
+        <a:effectLst/>
       </p:bgPr>
     </p:bg>
     <p:spTree>
@@ -10093,11 +9790,11 @@
           <a:bodyPr wrap="square" rtlCol="0" anchor="ctr"/>
           <a:lstStyle/>
           <a:p>
-            <a:pPr indent="0" marL="0">
-              <a:buNone/>
-            </a:pPr>
-            <a:r>
-              <a:rPr lang="en-US" sz="1100" b="1" spc="600" kern="0" dirty="0">
+            <a:pPr marL="0" indent="0">
+              <a:buNone/>
+            </a:pPr>
+            <a:r>
+              <a:rPr lang="en-US" sz="1100" b="1" kern="0" spc="600" dirty="0">
                 <a:solidFill>
                   <a:srgbClr val="8C6810"/>
                 </a:solidFill>
@@ -10132,7 +9829,7 @@
           <a:bodyPr wrap="square" rtlCol="0" anchor="ctr"/>
           <a:lstStyle/>
           <a:p>
-            <a:pPr indent="0" marL="0">
+            <a:pPr marL="0" indent="0">
               <a:buNone/>
             </a:pPr>
             <a:r>
@@ -10198,7 +9895,7 @@
           <a:bodyPr wrap="square" rtlCol="0" anchor="ctr"/>
           <a:lstStyle/>
           <a:p>
-            <a:pPr algn="ctr" indent="0" marL="0">
+            <a:pPr marL="0" indent="0" algn="ctr">
               <a:buNone/>
             </a:pPr>
             <a:r>
@@ -10237,7 +9934,7 @@
           <a:bodyPr wrap="square" rtlCol="0" anchor="ctr"/>
           <a:lstStyle/>
           <a:p>
-            <a:pPr algn="ctr" indent="0" marL="0">
+            <a:pPr marL="0" indent="0" algn="ctr">
               <a:buNone/>
             </a:pPr>
             <a:r>
@@ -10254,7 +9951,7 @@
             <a:endParaRPr lang="en-US" sz="1300" dirty="0"/>
           </a:p>
           <a:p>
-            <a:pPr algn="ctr" indent="0" marL="0">
+            <a:pPr marL="0" indent="0" algn="ctr">
               <a:buNone/>
             </a:pPr>
             <a:r>
@@ -10320,7 +10017,7 @@
           <a:bodyPr wrap="square" rtlCol="0" anchor="ctr"/>
           <a:lstStyle/>
           <a:p>
-            <a:pPr algn="ctr" indent="0" marL="0">
+            <a:pPr marL="0" indent="0" algn="ctr">
               <a:buNone/>
             </a:pPr>
             <a:r>
@@ -10359,7 +10056,7 @@
           <a:bodyPr wrap="square" rtlCol="0" anchor="ctr"/>
           <a:lstStyle/>
           <a:p>
-            <a:pPr algn="ctr" indent="0" marL="0">
+            <a:pPr marL="0" indent="0" algn="ctr">
               <a:buNone/>
             </a:pPr>
             <a:r>
@@ -10376,7 +10073,7 @@
             <a:endParaRPr lang="en-US" sz="1300" dirty="0"/>
           </a:p>
           <a:p>
-            <a:pPr algn="ctr" indent="0" marL="0">
+            <a:pPr marL="0" indent="0" algn="ctr">
               <a:buNone/>
             </a:pPr>
             <a:r>
@@ -10442,7 +10139,7 @@
           <a:bodyPr wrap="square" rtlCol="0" anchor="ctr"/>
           <a:lstStyle/>
           <a:p>
-            <a:pPr algn="ctr" indent="0" marL="0">
+            <a:pPr marL="0" indent="0" algn="ctr">
               <a:buNone/>
             </a:pPr>
             <a:r>
@@ -10481,7 +10178,7 @@
           <a:bodyPr wrap="square" rtlCol="0" anchor="ctr"/>
           <a:lstStyle/>
           <a:p>
-            <a:pPr algn="ctr" indent="0" marL="0">
+            <a:pPr marL="0" indent="0" algn="ctr">
               <a:buNone/>
             </a:pPr>
             <a:r>
@@ -10498,7 +10195,7 @@
             <a:endParaRPr lang="en-US" sz="1300" dirty="0"/>
           </a:p>
           <a:p>
-            <a:pPr algn="ctr" indent="0" marL="0">
+            <a:pPr marL="0" indent="0" algn="ctr">
               <a:buNone/>
             </a:pPr>
             <a:r>
@@ -10537,7 +10234,7 @@
           <a:bodyPr wrap="square" rtlCol="0" anchor="ctr"/>
           <a:lstStyle/>
           <a:p>
-            <a:pPr indent="0" marL="0">
+            <a:pPr marL="0" indent="0">
               <a:buNone/>
             </a:pPr>
             <a:r>
@@ -10576,7 +10273,7 @@
           <a:bodyPr wrap="square" rtlCol="0" anchor="ctr"/>
           <a:lstStyle/>
           <a:p>
-            <a:pPr algn="r" indent="0" marL="0">
+            <a:pPr marL="0" indent="0" algn="r">
               <a:buNone/>
             </a:pPr>
             <a:r>
@@ -10615,7 +10312,7 @@
           <a:bodyPr wrap="square" rtlCol="0" anchor="ctr"/>
           <a:lstStyle/>
           <a:p>
-            <a:pPr indent="0" marL="0">
+            <a:pPr marL="0" indent="0">
               <a:buNone/>
             </a:pPr>
             <a:r>
@@ -10649,6 +10346,7 @@
         <a:solidFill>
           <a:srgbClr val="0E0E0E"/>
         </a:solidFill>
+        <a:effectLst/>
       </p:bgPr>
     </p:bg>
     <p:spTree>
@@ -10686,11 +10384,11 @@
           <a:bodyPr wrap="square" rtlCol="0" anchor="ctr"/>
           <a:lstStyle/>
           <a:p>
-            <a:pPr indent="0" marL="0">
-              <a:buNone/>
-            </a:pPr>
-            <a:r>
-              <a:rPr lang="en-US" sz="1100" b="1" spc="600" kern="0" dirty="0">
+            <a:pPr marL="0" indent="0">
+              <a:buNone/>
+            </a:pPr>
+            <a:r>
+              <a:rPr lang="en-US" sz="1100" b="1" kern="0" spc="600" dirty="0">
                 <a:solidFill>
                   <a:srgbClr val="DAA520"/>
                 </a:solidFill>
@@ -10725,7 +10423,7 @@
           <a:bodyPr wrap="square" rtlCol="0" anchor="ctr"/>
           <a:lstStyle/>
           <a:p>
-            <a:pPr indent="0" marL="0">
+            <a:pPr marL="0" indent="0">
               <a:buNone/>
             </a:pPr>
             <a:r>
@@ -10789,7 +10487,7 @@
           <a:bodyPr wrap="square" rtlCol="0" anchor="ctr"/>
           <a:lstStyle/>
           <a:p>
-            <a:pPr algn="ctr" indent="0" marL="0">
+            <a:pPr marL="0" indent="0" algn="ctr">
               <a:buNone/>
             </a:pPr>
             <a:r>
@@ -10828,7 +10526,7 @@
           <a:bodyPr wrap="square" rtlCol="0" anchor="ctr"/>
           <a:lstStyle/>
           <a:p>
-            <a:pPr indent="0" marL="0">
+            <a:pPr marL="0" indent="0">
               <a:buNone/>
             </a:pPr>
             <a:r>
@@ -10867,7 +10565,7 @@
           <a:bodyPr wrap="square" rtlCol="0" anchor="ctr"/>
           <a:lstStyle/>
           <a:p>
-            <a:pPr indent="0" marL="0">
+            <a:pPr marL="0" indent="0">
               <a:buNone/>
             </a:pPr>
             <a:r>
@@ -10931,7 +10629,7 @@
           <a:bodyPr wrap="square" rtlCol="0" anchor="ctr"/>
           <a:lstStyle/>
           <a:p>
-            <a:pPr algn="ctr" indent="0" marL="0">
+            <a:pPr marL="0" indent="0" algn="ctr">
               <a:buNone/>
             </a:pPr>
             <a:r>
@@ -10970,7 +10668,7 @@
           <a:bodyPr wrap="square" rtlCol="0" anchor="ctr"/>
           <a:lstStyle/>
           <a:p>
-            <a:pPr indent="0" marL="0">
+            <a:pPr marL="0" indent="0">
               <a:buNone/>
             </a:pPr>
             <a:r>
@@ -11009,7 +10707,7 @@
           <a:bodyPr wrap="square" rtlCol="0" anchor="ctr"/>
           <a:lstStyle/>
           <a:p>
-            <a:pPr indent="0" marL="0">
+            <a:pPr marL="0" indent="0">
               <a:buNone/>
             </a:pPr>
             <a:r>
@@ -11073,7 +10771,7 @@
           <a:bodyPr wrap="square" rtlCol="0" anchor="ctr"/>
           <a:lstStyle/>
           <a:p>
-            <a:pPr algn="ctr" indent="0" marL="0">
+            <a:pPr marL="0" indent="0" algn="ctr">
               <a:buNone/>
             </a:pPr>
             <a:r>
@@ -11112,7 +10810,7 @@
           <a:bodyPr wrap="square" rtlCol="0" anchor="ctr"/>
           <a:lstStyle/>
           <a:p>
-            <a:pPr indent="0" marL="0">
+            <a:pPr marL="0" indent="0">
               <a:buNone/>
             </a:pPr>
             <a:r>
@@ -11151,7 +10849,7 @@
           <a:bodyPr wrap="square" rtlCol="0" anchor="ctr"/>
           <a:lstStyle/>
           <a:p>
-            <a:pPr indent="0" marL="0">
+            <a:pPr marL="0" indent="0">
               <a:buNone/>
             </a:pPr>
             <a:r>
@@ -11215,7 +10913,7 @@
           <a:bodyPr wrap="square" rtlCol="0" anchor="ctr"/>
           <a:lstStyle/>
           <a:p>
-            <a:pPr algn="ctr" indent="0" marL="0">
+            <a:pPr marL="0" indent="0" algn="ctr">
               <a:buNone/>
             </a:pPr>
             <a:r>
@@ -11254,7 +10952,7 @@
           <a:bodyPr wrap="square" rtlCol="0" anchor="ctr"/>
           <a:lstStyle/>
           <a:p>
-            <a:pPr indent="0" marL="0">
+            <a:pPr marL="0" indent="0">
               <a:buNone/>
             </a:pPr>
             <a:r>
@@ -11293,7 +10991,7 @@
           <a:bodyPr wrap="square" rtlCol="0" anchor="ctr"/>
           <a:lstStyle/>
           <a:p>
-            <a:pPr indent="0" marL="0">
+            <a:pPr marL="0" indent="0">
               <a:buNone/>
             </a:pPr>
             <a:r>
@@ -11357,7 +11055,7 @@
           <a:bodyPr wrap="square" rtlCol="0" anchor="ctr"/>
           <a:lstStyle/>
           <a:p>
-            <a:pPr algn="ctr" indent="0" marL="0">
+            <a:pPr marL="0" indent="0" algn="ctr">
               <a:buNone/>
             </a:pPr>
             <a:r>
@@ -11396,7 +11094,7 @@
           <a:bodyPr wrap="square" rtlCol="0" anchor="ctr"/>
           <a:lstStyle/>
           <a:p>
-            <a:pPr indent="0" marL="0">
+            <a:pPr marL="0" indent="0">
               <a:buNone/>
             </a:pPr>
             <a:r>
@@ -11435,7 +11133,7 @@
           <a:bodyPr wrap="square" rtlCol="0" anchor="ctr"/>
           <a:lstStyle/>
           <a:p>
-            <a:pPr indent="0" marL="0">
+            <a:pPr marL="0" indent="0">
               <a:buNone/>
             </a:pPr>
             <a:r>
@@ -11474,7 +11172,7 @@
           <a:bodyPr wrap="square" rtlCol="0" anchor="ctr"/>
           <a:lstStyle/>
           <a:p>
-            <a:pPr algn="r" indent="0" marL="0">
+            <a:pPr marL="0" indent="0" algn="r">
               <a:buNone/>
             </a:pPr>
             <a:r>
@@ -11513,7 +11211,7 @@
           <a:bodyPr wrap="square" rtlCol="0" anchor="ctr"/>
           <a:lstStyle/>
           <a:p>
-            <a:pPr indent="0" marL="0">
+            <a:pPr marL="0" indent="0">
               <a:buNone/>
             </a:pPr>
             <a:r>
@@ -11547,6 +11245,7 @@
         <a:solidFill>
           <a:srgbClr val="FFFFFF"/>
         </a:solidFill>
+        <a:effectLst/>
       </p:bgPr>
     </p:bg>
     <p:spTree>
@@ -11584,11 +11283,11 @@
           <a:bodyPr wrap="square" rtlCol="0" anchor="ctr"/>
           <a:lstStyle/>
           <a:p>
-            <a:pPr indent="0" marL="0">
-              <a:buNone/>
-            </a:pPr>
-            <a:r>
-              <a:rPr lang="en-US" sz="1100" b="1" spc="600" kern="0" dirty="0">
+            <a:pPr marL="0" indent="0">
+              <a:buNone/>
+            </a:pPr>
+            <a:r>
+              <a:rPr lang="en-US" sz="1100" b="1" kern="0" spc="600" dirty="0">
                 <a:solidFill>
                   <a:srgbClr val="8C6810"/>
                 </a:solidFill>
@@ -11623,7 +11322,7 @@
           <a:bodyPr wrap="square" rtlCol="0" anchor="ctr"/>
           <a:lstStyle/>
           <a:p>
-            <a:pPr indent="0" marL="0">
+            <a:pPr marL="0" indent="0">
               <a:buNone/>
             </a:pPr>
             <a:r>
@@ -11662,7 +11361,7 @@
           <a:bodyPr wrap="square" rtlCol="0" anchor="ctr"/>
           <a:lstStyle/>
           <a:p>
-            <a:pPr indent="0" marL="0">
+            <a:pPr marL="0" indent="0">
               <a:buNone/>
             </a:pPr>
             <a:r>
@@ -11728,11 +11427,11 @@
           <a:bodyPr wrap="square" rtlCol="0" anchor="ctr"/>
           <a:lstStyle/>
           <a:p>
-            <a:pPr indent="0" marL="0">
-              <a:buNone/>
-            </a:pPr>
-            <a:r>
-              <a:rPr lang="en-US" sz="1000" b="1" spc="600" kern="0" dirty="0">
+            <a:pPr marL="0" indent="0">
+              <a:buNone/>
+            </a:pPr>
+            <a:r>
+              <a:rPr lang="en-US" sz="1000" b="1" kern="0" spc="600" dirty="0">
                 <a:solidFill>
                   <a:srgbClr val="8C6810"/>
                 </a:solidFill>
@@ -11767,7 +11466,7 @@
           <a:bodyPr wrap="square" rtlCol="0" anchor="ctr"/>
           <a:lstStyle/>
           <a:p>
-            <a:pPr indent="0" marL="0">
+            <a:pPr marL="0" indent="0">
               <a:buNone/>
             </a:pPr>
             <a:r>
@@ -11806,7 +11505,7 @@
           <a:bodyPr wrap="square" rtlCol="0" anchor="ctr"/>
           <a:lstStyle/>
           <a:p>
-            <a:pPr indent="0" marL="0">
+            <a:pPr marL="0" indent="0">
               <a:buNone/>
             </a:pPr>
             <a:r>
@@ -11872,11 +11571,11 @@
           <a:bodyPr wrap="square" rtlCol="0" anchor="ctr"/>
           <a:lstStyle/>
           <a:p>
-            <a:pPr indent="0" marL="0">
-              <a:buNone/>
-            </a:pPr>
-            <a:r>
-              <a:rPr lang="en-US" sz="1000" b="1" spc="600" kern="0" dirty="0">
+            <a:pPr marL="0" indent="0">
+              <a:buNone/>
+            </a:pPr>
+            <a:r>
+              <a:rPr lang="en-US" sz="1000" b="1" kern="0" spc="600" dirty="0">
                 <a:solidFill>
                   <a:srgbClr val="8C6810"/>
                 </a:solidFill>
@@ -11911,7 +11610,7 @@
           <a:bodyPr wrap="square" rtlCol="0" anchor="ctr"/>
           <a:lstStyle/>
           <a:p>
-            <a:pPr indent="0" marL="0">
+            <a:pPr marL="0" indent="0">
               <a:buNone/>
             </a:pPr>
             <a:r>
@@ -11950,7 +11649,7 @@
           <a:bodyPr wrap="square" rtlCol="0" anchor="ctr"/>
           <a:lstStyle/>
           <a:p>
-            <a:pPr indent="0" marL="0">
+            <a:pPr marL="0" indent="0">
               <a:buNone/>
             </a:pPr>
             <a:r>
@@ -12016,11 +11715,11 @@
           <a:bodyPr wrap="square" rtlCol="0" anchor="ctr"/>
           <a:lstStyle/>
           <a:p>
-            <a:pPr indent="0" marL="0">
-              <a:buNone/>
-            </a:pPr>
-            <a:r>
-              <a:rPr lang="en-US" sz="1000" b="1" spc="600" kern="0" dirty="0">
+            <a:pPr marL="0" indent="0">
+              <a:buNone/>
+            </a:pPr>
+            <a:r>
+              <a:rPr lang="en-US" sz="1000" b="1" kern="0" spc="600" dirty="0">
                 <a:solidFill>
                   <a:srgbClr val="8C6810"/>
                 </a:solidFill>
@@ -12055,7 +11754,7 @@
           <a:bodyPr wrap="square" rtlCol="0" anchor="ctr"/>
           <a:lstStyle/>
           <a:p>
-            <a:pPr indent="0" marL="0">
+            <a:pPr marL="0" indent="0">
               <a:buNone/>
             </a:pPr>
             <a:r>
@@ -12094,7 +11793,7 @@
           <a:bodyPr wrap="square" rtlCol="0" anchor="ctr"/>
           <a:lstStyle/>
           <a:p>
-            <a:pPr indent="0" marL="0">
+            <a:pPr marL="0" indent="0">
               <a:buNone/>
             </a:pPr>
             <a:r>
@@ -12133,7 +11832,7 @@
           <a:bodyPr wrap="square" rtlCol="0" anchor="ctr"/>
           <a:lstStyle/>
           <a:p>
-            <a:pPr algn="r" indent="0" marL="0">
+            <a:pPr marL="0" indent="0" algn="r">
               <a:buNone/>
             </a:pPr>
             <a:r>
@@ -12172,7 +11871,7 @@
           <a:bodyPr wrap="square" rtlCol="0" anchor="ctr"/>
           <a:lstStyle/>
           <a:p>
-            <a:pPr indent="0" marL="0">
+            <a:pPr marL="0" indent="0">
               <a:buNone/>
             </a:pPr>
             <a:r>
@@ -12206,6 +11905,7 @@
         <a:solidFill>
           <a:srgbClr val="FFFFFF"/>
         </a:solidFill>
+        <a:effectLst/>
       </p:bgPr>
     </p:bg>
     <p:spTree>
@@ -12243,11 +11943,11 @@
           <a:bodyPr wrap="square" rtlCol="0" anchor="ctr"/>
           <a:lstStyle/>
           <a:p>
-            <a:pPr indent="0" marL="0">
-              <a:buNone/>
-            </a:pPr>
-            <a:r>
-              <a:rPr lang="en-US" sz="1100" b="1" spc="600" kern="0" dirty="0">
+            <a:pPr marL="0" indent="0">
+              <a:buNone/>
+            </a:pPr>
+            <a:r>
+              <a:rPr lang="en-US" sz="1100" b="1" kern="0" spc="600" dirty="0">
                 <a:solidFill>
                   <a:srgbClr val="8C6810"/>
                 </a:solidFill>
@@ -12282,7 +11982,7 @@
           <a:bodyPr wrap="square" rtlCol="0" anchor="ctr"/>
           <a:lstStyle/>
           <a:p>
-            <a:pPr indent="0" marL="0">
+            <a:pPr marL="0" indent="0">
               <a:buNone/>
             </a:pPr>
             <a:r>
@@ -12346,7 +12046,7 @@
           <a:bodyPr wrap="square" rtlCol="0" anchor="ctr"/>
           <a:lstStyle/>
           <a:p>
-            <a:pPr algn="ctr" indent="0" marL="0">
+            <a:pPr marL="0" indent="0" algn="ctr">
               <a:buNone/>
             </a:pPr>
             <a:r>
@@ -12385,7 +12085,7 @@
           <a:bodyPr wrap="square" rtlCol="0" anchor="ctr"/>
           <a:lstStyle/>
           <a:p>
-            <a:pPr indent="0" marL="0">
+            <a:pPr marL="0" indent="0">
               <a:buNone/>
             </a:pPr>
             <a:r>
@@ -12424,7 +12124,7 @@
           <a:bodyPr wrap="square" rtlCol="0" anchor="ctr"/>
           <a:lstStyle/>
           <a:p>
-            <a:pPr indent="0" marL="0">
+            <a:pPr marL="0" indent="0">
               <a:buNone/>
             </a:pPr>
             <a:r>
@@ -12488,7 +12188,7 @@
           <a:bodyPr wrap="square" rtlCol="0" anchor="ctr"/>
           <a:lstStyle/>
           <a:p>
-            <a:pPr algn="ctr" indent="0" marL="0">
+            <a:pPr marL="0" indent="0" algn="ctr">
               <a:buNone/>
             </a:pPr>
             <a:r>
@@ -12527,7 +12227,7 @@
           <a:bodyPr wrap="square" rtlCol="0" anchor="ctr"/>
           <a:lstStyle/>
           <a:p>
-            <a:pPr indent="0" marL="0">
+            <a:pPr marL="0" indent="0">
               <a:buNone/>
             </a:pPr>
             <a:r>
@@ -12566,7 +12266,7 @@
           <a:bodyPr wrap="square" rtlCol="0" anchor="ctr"/>
           <a:lstStyle/>
           <a:p>
-            <a:pPr indent="0" marL="0">
+            <a:pPr marL="0" indent="0">
               <a:buNone/>
             </a:pPr>
             <a:r>
@@ -12630,7 +12330,7 @@
           <a:bodyPr wrap="square" rtlCol="0" anchor="ctr"/>
           <a:lstStyle/>
           <a:p>
-            <a:pPr algn="ctr" indent="0" marL="0">
+            <a:pPr marL="0" indent="0" algn="ctr">
               <a:buNone/>
             </a:pPr>
             <a:r>
@@ -12669,7 +12369,7 @@
           <a:bodyPr wrap="square" rtlCol="0" anchor="ctr"/>
           <a:lstStyle/>
           <a:p>
-            <a:pPr indent="0" marL="0">
+            <a:pPr marL="0" indent="0">
               <a:buNone/>
             </a:pPr>
             <a:r>
@@ -12708,7 +12408,7 @@
           <a:bodyPr wrap="square" rtlCol="0" anchor="ctr"/>
           <a:lstStyle/>
           <a:p>
-            <a:pPr indent="0" marL="0">
+            <a:pPr marL="0" indent="0">
               <a:buNone/>
             </a:pPr>
             <a:r>
@@ -12772,7 +12472,7 @@
           <a:bodyPr wrap="square" rtlCol="0" anchor="ctr"/>
           <a:lstStyle/>
           <a:p>
-            <a:pPr algn="ctr" indent="0" marL="0">
+            <a:pPr marL="0" indent="0" algn="ctr">
               <a:buNone/>
             </a:pPr>
             <a:r>
@@ -12811,7 +12511,7 @@
           <a:bodyPr wrap="square" rtlCol="0" anchor="ctr"/>
           <a:lstStyle/>
           <a:p>
-            <a:pPr indent="0" marL="0">
+            <a:pPr marL="0" indent="0">
               <a:buNone/>
             </a:pPr>
             <a:r>
@@ -12850,7 +12550,7 @@
           <a:bodyPr wrap="square" rtlCol="0" anchor="ctr"/>
           <a:lstStyle/>
           <a:p>
-            <a:pPr indent="0" marL="0">
+            <a:pPr marL="0" indent="0">
               <a:buNone/>
             </a:pPr>
             <a:r>
@@ -12914,7 +12614,7 @@
           <a:bodyPr wrap="square" rtlCol="0" anchor="ctr"/>
           <a:lstStyle/>
           <a:p>
-            <a:pPr algn="ctr" indent="0" marL="0">
+            <a:pPr marL="0" indent="0" algn="ctr">
               <a:buNone/>
             </a:pPr>
             <a:r>
@@ -12953,7 +12653,7 @@
           <a:bodyPr wrap="square" rtlCol="0" anchor="ctr"/>
           <a:lstStyle/>
           <a:p>
-            <a:pPr indent="0" marL="0">
+            <a:pPr marL="0" indent="0">
               <a:buNone/>
             </a:pPr>
             <a:r>
@@ -12992,7 +12692,7 @@
           <a:bodyPr wrap="square" rtlCol="0" anchor="ctr"/>
           <a:lstStyle/>
           <a:p>
-            <a:pPr indent="0" marL="0">
+            <a:pPr marL="0" indent="0">
               <a:buNone/>
             </a:pPr>
             <a:r>
@@ -13031,7 +12731,7 @@
           <a:bodyPr wrap="square" rtlCol="0" anchor="ctr"/>
           <a:lstStyle/>
           <a:p>
-            <a:pPr algn="r" indent="0" marL="0">
+            <a:pPr marL="0" indent="0" algn="r">
               <a:buNone/>
             </a:pPr>
             <a:r>
@@ -13070,7 +12770,7 @@
           <a:bodyPr wrap="square" rtlCol="0" anchor="ctr"/>
           <a:lstStyle/>
           <a:p>
-            <a:pPr indent="0" marL="0">
+            <a:pPr marL="0" indent="0">
               <a:buNone/>
             </a:pPr>
             <a:r>
@@ -13104,6 +12804,7 @@
         <a:solidFill>
           <a:srgbClr val="FFFFFF"/>
         </a:solidFill>
+        <a:effectLst/>
       </p:bgPr>
     </p:bg>
     <p:spTree>
@@ -13141,11 +12842,11 @@
           <a:bodyPr wrap="square" rtlCol="0" anchor="ctr"/>
           <a:lstStyle/>
           <a:p>
-            <a:pPr indent="0" marL="0">
-              <a:buNone/>
-            </a:pPr>
-            <a:r>
-              <a:rPr lang="en-US" sz="1100" b="1" spc="600" kern="0" dirty="0">
+            <a:pPr marL="0" indent="0">
+              <a:buNone/>
+            </a:pPr>
+            <a:r>
+              <a:rPr lang="en-US" sz="1100" b="1" kern="0" spc="600" dirty="0">
                 <a:solidFill>
                   <a:srgbClr val="8C6810"/>
                 </a:solidFill>
@@ -13180,7 +12881,7 @@
           <a:bodyPr wrap="square" rtlCol="0" anchor="ctr"/>
           <a:lstStyle/>
           <a:p>
-            <a:pPr indent="0" marL="0">
+            <a:pPr marL="0" indent="0">
               <a:buNone/>
             </a:pPr>
             <a:r>
@@ -13246,7 +12947,7 @@
           <a:bodyPr wrap="square" rtlCol="0" anchor="ctr"/>
           <a:lstStyle/>
           <a:p>
-            <a:pPr algn="ctr" indent="0" marL="0">
+            <a:pPr marL="0" indent="0" algn="ctr">
               <a:buNone/>
             </a:pPr>
             <a:r>
@@ -13285,7 +12986,7 @@
           <a:bodyPr wrap="square" rtlCol="0" anchor="ctr"/>
           <a:lstStyle/>
           <a:p>
-            <a:pPr algn="ctr" indent="0" marL="0">
+            <a:pPr marL="0" indent="0" algn="ctr">
               <a:buNone/>
             </a:pPr>
             <a:r>
@@ -13324,11 +13025,11 @@
           <a:bodyPr wrap="square" rtlCol="0" anchor="ctr"/>
           <a:lstStyle/>
           <a:p>
-            <a:pPr algn="ctr" indent="0" marL="0">
-              <a:buNone/>
-            </a:pPr>
-            <a:r>
-              <a:rPr lang="en-US" sz="900" spc="400" kern="0" dirty="0">
+            <a:pPr marL="0" indent="0" algn="ctr">
+              <a:buNone/>
+            </a:pPr>
+            <a:r>
+              <a:rPr lang="en-US" sz="900" kern="0" spc="400" dirty="0">
                 <a:solidFill>
                   <a:srgbClr val="8C6810"/>
                 </a:solidFill>
@@ -13390,7 +13091,7 @@
           <a:bodyPr wrap="square" rtlCol="0" anchor="ctr"/>
           <a:lstStyle/>
           <a:p>
-            <a:pPr algn="ctr" indent="0" marL="0">
+            <a:pPr marL="0" indent="0" algn="ctr">
               <a:buNone/>
             </a:pPr>
             <a:r>
@@ -13429,7 +13130,7 @@
           <a:bodyPr wrap="square" rtlCol="0" anchor="ctr"/>
           <a:lstStyle/>
           <a:p>
-            <a:pPr algn="ctr" indent="0" marL="0">
+            <a:pPr marL="0" indent="0" algn="ctr">
               <a:buNone/>
             </a:pPr>
             <a:r>
@@ -13468,11 +13169,11 @@
           <a:bodyPr wrap="square" rtlCol="0" anchor="ctr"/>
           <a:lstStyle/>
           <a:p>
-            <a:pPr algn="ctr" indent="0" marL="0">
-              <a:buNone/>
-            </a:pPr>
-            <a:r>
-              <a:rPr lang="en-US" sz="900" spc="400" kern="0" dirty="0">
+            <a:pPr marL="0" indent="0" algn="ctr">
+              <a:buNone/>
+            </a:pPr>
+            <a:r>
+              <a:rPr lang="en-US" sz="900" kern="0" spc="400" dirty="0">
                 <a:solidFill>
                   <a:srgbClr val="8C6810"/>
                 </a:solidFill>
@@ -13534,7 +13235,7 @@
           <a:bodyPr wrap="square" rtlCol="0" anchor="ctr"/>
           <a:lstStyle/>
           <a:p>
-            <a:pPr algn="ctr" indent="0" marL="0">
+            <a:pPr marL="0" indent="0" algn="ctr">
               <a:buNone/>
             </a:pPr>
             <a:r>
@@ -13573,7 +13274,7 @@
           <a:bodyPr wrap="square" rtlCol="0" anchor="ctr"/>
           <a:lstStyle/>
           <a:p>
-            <a:pPr algn="ctr" indent="0" marL="0">
+            <a:pPr marL="0" indent="0" algn="ctr">
               <a:buNone/>
             </a:pPr>
             <a:r>
@@ -13612,11 +13313,11 @@
           <a:bodyPr wrap="square" rtlCol="0" anchor="ctr"/>
           <a:lstStyle/>
           <a:p>
-            <a:pPr algn="ctr" indent="0" marL="0">
-              <a:buNone/>
-            </a:pPr>
-            <a:r>
-              <a:rPr lang="en-US" sz="900" spc="400" kern="0" dirty="0">
+            <a:pPr marL="0" indent="0" algn="ctr">
+              <a:buNone/>
+            </a:pPr>
+            <a:r>
+              <a:rPr lang="en-US" sz="900" kern="0" spc="400" dirty="0">
                 <a:solidFill>
                   <a:srgbClr val="8C6810"/>
                 </a:solidFill>
@@ -13678,7 +13379,7 @@
           <a:bodyPr wrap="square" rtlCol="0" anchor="ctr"/>
           <a:lstStyle/>
           <a:p>
-            <a:pPr algn="ctr" indent="0" marL="0">
+            <a:pPr marL="0" indent="0" algn="ctr">
               <a:buNone/>
             </a:pPr>
             <a:r>
@@ -13717,7 +13418,7 @@
           <a:bodyPr wrap="square" rtlCol="0" anchor="ctr"/>
           <a:lstStyle/>
           <a:p>
-            <a:pPr algn="ctr" indent="0" marL="0">
+            <a:pPr marL="0" indent="0" algn="ctr">
               <a:buNone/>
             </a:pPr>
             <a:r>
@@ -13756,11 +13457,11 @@
           <a:bodyPr wrap="square" rtlCol="0" anchor="ctr"/>
           <a:lstStyle/>
           <a:p>
-            <a:pPr algn="ctr" indent="0" marL="0">
-              <a:buNone/>
-            </a:pPr>
-            <a:r>
-              <a:rPr lang="en-US" sz="900" spc="400" kern="0" dirty="0">
+            <a:pPr marL="0" indent="0" algn="ctr">
+              <a:buNone/>
+            </a:pPr>
+            <a:r>
+              <a:rPr lang="en-US" sz="900" kern="0" spc="400" dirty="0">
                 <a:solidFill>
                   <a:srgbClr val="8C6810"/>
                 </a:solidFill>
@@ -13822,7 +13523,7 @@
           <a:bodyPr wrap="square" rtlCol="0" anchor="ctr"/>
           <a:lstStyle/>
           <a:p>
-            <a:pPr algn="ctr" indent="0" marL="0">
+            <a:pPr marL="0" indent="0" algn="ctr">
               <a:buNone/>
             </a:pPr>
             <a:r>
@@ -13861,7 +13562,7 @@
           <a:bodyPr wrap="square" rtlCol="0" anchor="ctr"/>
           <a:lstStyle/>
           <a:p>
-            <a:pPr algn="ctr" indent="0" marL="0">
+            <a:pPr marL="0" indent="0" algn="ctr">
               <a:buNone/>
             </a:pPr>
             <a:r>
@@ -13900,11 +13601,11 @@
           <a:bodyPr wrap="square" rtlCol="0" anchor="ctr"/>
           <a:lstStyle/>
           <a:p>
-            <a:pPr algn="ctr" indent="0" marL="0">
-              <a:buNone/>
-            </a:pPr>
-            <a:r>
-              <a:rPr lang="en-US" sz="900" spc="400" kern="0" dirty="0">
+            <a:pPr marL="0" indent="0" algn="ctr">
+              <a:buNone/>
+            </a:pPr>
+            <a:r>
+              <a:rPr lang="en-US" sz="900" kern="0" spc="400" dirty="0">
                 <a:solidFill>
                   <a:srgbClr val="8C6810"/>
                 </a:solidFill>
@@ -13966,7 +13667,7 @@
           <a:bodyPr wrap="square" rtlCol="0" anchor="ctr"/>
           <a:lstStyle/>
           <a:p>
-            <a:pPr algn="ctr" indent="0" marL="0">
+            <a:pPr marL="0" indent="0" algn="ctr">
               <a:buNone/>
             </a:pPr>
             <a:r>
@@ -14005,7 +13706,7 @@
           <a:bodyPr wrap="square" rtlCol="0" anchor="ctr"/>
           <a:lstStyle/>
           <a:p>
-            <a:pPr algn="ctr" indent="0" marL="0">
+            <a:pPr marL="0" indent="0" algn="ctr">
               <a:buNone/>
             </a:pPr>
             <a:r>
@@ -14044,11 +13745,11 @@
           <a:bodyPr wrap="square" rtlCol="0" anchor="ctr"/>
           <a:lstStyle/>
           <a:p>
-            <a:pPr algn="ctr" indent="0" marL="0">
-              <a:buNone/>
-            </a:pPr>
-            <a:r>
-              <a:rPr lang="en-US" sz="900" spc="400" kern="0" dirty="0">
+            <a:pPr marL="0" indent="0" algn="ctr">
+              <a:buNone/>
+            </a:pPr>
+            <a:r>
+              <a:rPr lang="en-US" sz="900" kern="0" spc="400" dirty="0">
                 <a:solidFill>
                   <a:srgbClr val="8C6810"/>
                 </a:solidFill>
@@ -14083,7 +13784,7 @@
           <a:bodyPr wrap="square" rtlCol="0" anchor="ctr"/>
           <a:lstStyle/>
           <a:p>
-            <a:pPr algn="ctr" indent="0" marL="0">
+            <a:pPr marL="0" indent="0" algn="ctr">
               <a:buNone/>
             </a:pPr>
             <a:r>
@@ -14122,7 +13823,7 @@
           <a:bodyPr wrap="square" rtlCol="0" anchor="ctr"/>
           <a:lstStyle/>
           <a:p>
-            <a:pPr algn="r" indent="0" marL="0">
+            <a:pPr marL="0" indent="0" algn="r">
               <a:buNone/>
             </a:pPr>
             <a:r>
@@ -14161,7 +13862,7 @@
           <a:bodyPr wrap="square" rtlCol="0" anchor="ctr"/>
           <a:lstStyle/>
           <a:p>
-            <a:pPr indent="0" marL="0">
+            <a:pPr marL="0" indent="0">
               <a:buNone/>
             </a:pPr>
             <a:r>
@@ -14195,6 +13896,7 @@
         <a:solidFill>
           <a:srgbClr val="0E0E0E"/>
         </a:solidFill>
+        <a:effectLst/>
       </p:bgPr>
     </p:bg>
     <p:spTree>
@@ -14232,11 +13934,11 @@
           <a:bodyPr wrap="square" rtlCol="0" anchor="ctr"/>
           <a:lstStyle/>
           <a:p>
-            <a:pPr indent="0" marL="0">
-              <a:buNone/>
-            </a:pPr>
-            <a:r>
-              <a:rPr lang="en-US" sz="1100" b="1" spc="600" kern="0" dirty="0">
+            <a:pPr marL="0" indent="0">
+              <a:buNone/>
+            </a:pPr>
+            <a:r>
+              <a:rPr lang="en-US" sz="1100" b="1" kern="0" spc="600" dirty="0">
                 <a:solidFill>
                   <a:srgbClr val="DAA520"/>
                 </a:solidFill>
@@ -14271,7 +13973,7 @@
           <a:bodyPr wrap="square" rtlCol="0" anchor="ctr"/>
           <a:lstStyle/>
           <a:p>
-            <a:pPr indent="0" marL="0">
+            <a:pPr marL="0" indent="0">
               <a:buNone/>
             </a:pPr>
             <a:r>
@@ -14310,7 +14012,7 @@
           <a:bodyPr wrap="square" rtlCol="0" anchor="t"/>
           <a:lstStyle/>
           <a:p>
-            <a:pPr indent="0" marL="0">
+            <a:pPr marL="0" indent="0">
               <a:buNone/>
             </a:pPr>
             <a:r>
@@ -14328,7 +14030,7 @@
             <a:endParaRPr lang="en-US" sz="1800" dirty="0"/>
           </a:p>
           <a:p>
-            <a:pPr indent="0" marL="0">
+            <a:pPr marL="0" indent="0">
               <a:buNone/>
             </a:pPr>
             <a:r>
@@ -14346,7 +14048,7 @@
             <a:endParaRPr lang="en-US" sz="1800" dirty="0"/>
           </a:p>
           <a:p>
-            <a:pPr indent="0" marL="0">
+            <a:pPr marL="0" indent="0">
               <a:buNone/>
             </a:pPr>
             <a:r>
@@ -14364,7 +14066,7 @@
             <a:endParaRPr lang="en-US" sz="1800" dirty="0"/>
           </a:p>
           <a:p>
-            <a:pPr indent="0" marL="0">
+            <a:pPr marL="0" indent="0">
               <a:buNone/>
             </a:pPr>
             <a:r>
@@ -14382,7 +14084,7 @@
             <a:endParaRPr lang="en-US" sz="1800" dirty="0"/>
           </a:p>
           <a:p>
-            <a:pPr indent="0" marL="0">
+            <a:pPr marL="0" indent="0">
               <a:buNone/>
             </a:pPr>
             <a:r>
@@ -14400,7 +14102,7 @@
             <a:endParaRPr lang="en-US" sz="1800" dirty="0"/>
           </a:p>
           <a:p>
-            <a:pPr indent="0" marL="0">
+            <a:pPr marL="0" indent="0">
               <a:buNone/>
             </a:pPr>
             <a:r>
@@ -14439,7 +14141,7 @@
           <a:bodyPr wrap="square" rtlCol="0" anchor="ctr"/>
           <a:lstStyle/>
           <a:p>
-            <a:pPr algn="r" indent="0" marL="0">
+            <a:pPr marL="0" indent="0" algn="r">
               <a:buNone/>
             </a:pPr>
             <a:r>
@@ -14478,7 +14180,7 @@
           <a:bodyPr wrap="square" rtlCol="0" anchor="ctr"/>
           <a:lstStyle/>
           <a:p>
-            <a:pPr indent="0" marL="0">
+            <a:pPr marL="0" indent="0">
               <a:buNone/>
             </a:pPr>
             <a:r>
@@ -14512,6 +14214,7 @@
         <a:solidFill>
           <a:srgbClr val="0E0E0E"/>
         </a:solidFill>
+        <a:effectLst/>
       </p:bgPr>
     </p:bg>
     <p:spTree>
@@ -14603,7 +14306,7 @@
           <a:bodyPr wrap="square" rtlCol="0" anchor="ctr"/>
           <a:lstStyle/>
           <a:p>
-            <a:pPr indent="0" marL="0">
+            <a:pPr marL="0" indent="0">
               <a:buNone/>
             </a:pPr>
             <a:r>
@@ -14642,7 +14345,7 @@
           <a:bodyPr wrap="square" rtlCol="0" anchor="ctr"/>
           <a:lstStyle/>
           <a:p>
-            <a:pPr indent="0" marL="0">
+            <a:pPr marL="0" indent="0">
               <a:buNone/>
             </a:pPr>
             <a:r>
@@ -14681,7 +14384,7 @@
           <a:bodyPr wrap="square" rtlCol="0" anchor="ctr"/>
           <a:lstStyle/>
           <a:p>
-            <a:pPr indent="0" marL="0">
+            <a:pPr marL="0" indent="0">
               <a:buNone/>
             </a:pPr>
             <a:r>
@@ -14695,9 +14398,6 @@
               </a:rPr>
               <a:t>Live site  </a:t>
             </a:r>
-            <a:pPr indent="0" marL="0">
-              <a:buNone/>
-            </a:pPr>
             <a:r>
               <a:rPr lang="en-US" sz="1400" dirty="0">
                 <a:solidFill>
@@ -14713,7 +14413,7 @@
             <a:endParaRPr lang="en-US" sz="1400" dirty="0"/>
           </a:p>
           <a:p>
-            <a:pPr indent="0" marL="0">
+            <a:pPr marL="0" indent="0">
               <a:buNone/>
             </a:pPr>
             <a:r>
@@ -14727,9 +14427,6 @@
               </a:rPr>
               <a:t>Repo  </a:t>
             </a:r>
-            <a:pPr indent="0" marL="0">
-              <a:buNone/>
-            </a:pPr>
             <a:r>
               <a:rPr lang="en-US" sz="1400" dirty="0">
                 <a:solidFill>
@@ -14745,7 +14442,7 @@
             <a:endParaRPr lang="en-US" sz="1400" dirty="0"/>
           </a:p>
           <a:p>
-            <a:pPr indent="0" marL="0">
+            <a:pPr marL="0" indent="0">
               <a:buNone/>
             </a:pPr>
             <a:r>
@@ -14759,9 +14456,6 @@
               </a:rPr>
               <a:t>Contact  </a:t>
             </a:r>
-            <a:pPr indent="0" marL="0">
-              <a:buNone/>
-            </a:pPr>
             <a:r>
               <a:rPr lang="en-US" sz="1400" dirty="0">
                 <a:solidFill>
@@ -14798,7 +14492,7 @@
           <a:bodyPr wrap="square" rtlCol="0" anchor="ctr"/>
           <a:lstStyle/>
           <a:p>
-            <a:pPr algn="r" indent="0" marL="0">
+            <a:pPr marL="0" indent="0" algn="r">
               <a:buNone/>
             </a:pPr>
             <a:r>
@@ -14837,7 +14531,7 @@
           <a:bodyPr wrap="square" rtlCol="0" anchor="ctr"/>
           <a:lstStyle/>
           <a:p>
-            <a:pPr indent="0" marL="0">
+            <a:pPr marL="0" indent="0">
               <a:buNone/>
             </a:pPr>
             <a:r>
@@ -14871,6 +14565,7 @@
         <a:solidFill>
           <a:srgbClr val="FFFFFF"/>
         </a:solidFill>
+        <a:effectLst/>
       </p:bgPr>
     </p:bg>
     <p:spTree>
@@ -14908,11 +14603,11 @@
           <a:bodyPr wrap="square" rtlCol="0" anchor="ctr"/>
           <a:lstStyle/>
           <a:p>
-            <a:pPr indent="0" marL="0">
-              <a:buNone/>
-            </a:pPr>
-            <a:r>
-              <a:rPr lang="en-US" sz="1100" b="1" spc="600" kern="0" dirty="0">
+            <a:pPr marL="0" indent="0">
+              <a:buNone/>
+            </a:pPr>
+            <a:r>
+              <a:rPr lang="en-US" sz="1100" b="1" kern="0" spc="600" dirty="0">
                 <a:solidFill>
                   <a:srgbClr val="8C6810"/>
                 </a:solidFill>
@@ -14947,7 +14642,7 @@
           <a:bodyPr wrap="square" rtlCol="0" anchor="ctr"/>
           <a:lstStyle/>
           <a:p>
-            <a:pPr indent="0" marL="0">
+            <a:pPr marL="0" indent="0">
               <a:buNone/>
             </a:pPr>
             <a:r>
@@ -15013,7 +14708,7 @@
           <a:bodyPr wrap="square" rtlCol="0" anchor="ctr"/>
           <a:lstStyle/>
           <a:p>
-            <a:pPr indent="0" marL="0">
+            <a:pPr marL="0" indent="0">
               <a:buNone/>
             </a:pPr>
             <a:r>
@@ -15052,11 +14747,11 @@
           <a:bodyPr wrap="square" rtlCol="0" anchor="ctr"/>
           <a:lstStyle/>
           <a:p>
-            <a:pPr indent="0" marL="0">
-              <a:buNone/>
-            </a:pPr>
-            <a:r>
-              <a:rPr lang="en-US" sz="1100" i="1" spc="400" kern="0" dirty="0">
+            <a:pPr marL="0" indent="0">
+              <a:buNone/>
+            </a:pPr>
+            <a:r>
+              <a:rPr lang="en-US" sz="1100" i="1" kern="0" spc="400" dirty="0">
                 <a:solidFill>
                   <a:srgbClr val="8C6810"/>
                 </a:solidFill>
@@ -15224,7 +14919,7 @@
           <a:bodyPr wrap="square" rtlCol="0" anchor="ctr"/>
           <a:lstStyle/>
           <a:p>
-            <a:pPr indent="0" marL="0">
+            <a:pPr marL="0" indent="0">
               <a:buNone/>
             </a:pPr>
             <a:r>
@@ -15263,11 +14958,11 @@
           <a:bodyPr wrap="square" rtlCol="0" anchor="ctr"/>
           <a:lstStyle/>
           <a:p>
-            <a:pPr indent="0" marL="0">
-              <a:buNone/>
-            </a:pPr>
-            <a:r>
-              <a:rPr lang="en-US" sz="1100" i="1" spc="400" kern="0" dirty="0">
+            <a:pPr marL="0" indent="0">
+              <a:buNone/>
+            </a:pPr>
+            <a:r>
+              <a:rPr lang="en-US" sz="1100" i="1" kern="0" spc="400" dirty="0">
                 <a:solidFill>
                   <a:srgbClr val="8C6810"/>
                 </a:solidFill>
@@ -15408,7 +15103,7 @@
           <a:bodyPr wrap="square" rtlCol="0" anchor="ctr"/>
           <a:lstStyle/>
           <a:p>
-            <a:pPr algn="ctr" indent="0" marL="0">
+            <a:pPr marL="0" indent="0" algn="ctr">
               <a:buNone/>
             </a:pPr>
             <a:r>
@@ -15447,7 +15142,7 @@
           <a:bodyPr wrap="square" rtlCol="0" anchor="ctr"/>
           <a:lstStyle/>
           <a:p>
-            <a:pPr algn="r" indent="0" marL="0">
+            <a:pPr marL="0" indent="0" algn="r">
               <a:buNone/>
             </a:pPr>
             <a:r>
@@ -15486,7 +15181,7 @@
           <a:bodyPr wrap="square" rtlCol="0" anchor="ctr"/>
           <a:lstStyle/>
           <a:p>
-            <a:pPr indent="0" marL="0">
+            <a:pPr marL="0" indent="0">
               <a:buNone/>
             </a:pPr>
             <a:r>
@@ -15520,6 +15215,7 @@
         <a:solidFill>
           <a:srgbClr val="FFFFFF"/>
         </a:solidFill>
+        <a:effectLst/>
       </p:bgPr>
     </p:bg>
     <p:spTree>
@@ -15557,11 +15253,11 @@
           <a:bodyPr wrap="square" rtlCol="0" anchor="ctr"/>
           <a:lstStyle/>
           <a:p>
-            <a:pPr indent="0" marL="0">
-              <a:buNone/>
-            </a:pPr>
-            <a:r>
-              <a:rPr lang="en-US" sz="1100" b="1" spc="600" kern="0" dirty="0">
+            <a:pPr marL="0" indent="0">
+              <a:buNone/>
+            </a:pPr>
+            <a:r>
+              <a:rPr lang="en-US" sz="1100" b="1" kern="0" spc="600" dirty="0">
                 <a:solidFill>
                   <a:srgbClr val="8C6810"/>
                 </a:solidFill>
@@ -15596,7 +15292,7 @@
           <a:bodyPr wrap="square" rtlCol="0" anchor="ctr"/>
           <a:lstStyle/>
           <a:p>
-            <a:pPr indent="0" marL="0">
+            <a:pPr marL="0" indent="0">
               <a:buNone/>
             </a:pPr>
             <a:r>
@@ -15660,7 +15356,7 @@
           <a:bodyPr wrap="square" rtlCol="0" anchor="ctr"/>
           <a:lstStyle/>
           <a:p>
-            <a:pPr algn="ctr" indent="0" marL="0">
+            <a:pPr marL="0" indent="0" algn="ctr">
               <a:buNone/>
             </a:pPr>
             <a:r>
@@ -15699,7 +15395,7 @@
           <a:bodyPr wrap="square" rtlCol="0" anchor="ctr"/>
           <a:lstStyle/>
           <a:p>
-            <a:pPr indent="0" marL="0">
+            <a:pPr marL="0" indent="0">
               <a:buNone/>
             </a:pPr>
             <a:r>
@@ -15716,11 +15412,11 @@
             <a:endParaRPr lang="en-US" sz="1800" dirty="0"/>
           </a:p>
           <a:p>
-            <a:pPr indent="0" marL="0">
-              <a:buNone/>
-            </a:pPr>
-            <a:r>
-              <a:rPr lang="en-US" sz="1100" i="1" spc="400" kern="0" dirty="0">
+            <a:pPr marL="0" indent="0">
+              <a:buNone/>
+            </a:pPr>
+            <a:r>
+              <a:rPr lang="en-US" sz="1100" i="1" kern="0" spc="400" dirty="0">
                 <a:solidFill>
                   <a:srgbClr val="8C6810"/>
                 </a:solidFill>
@@ -15755,7 +15451,7 @@
           <a:bodyPr wrap="square" rtlCol="0" anchor="ctr"/>
           <a:lstStyle/>
           <a:p>
-            <a:pPr indent="0" marL="0">
+            <a:pPr marL="0" indent="0">
               <a:buNone/>
             </a:pPr>
             <a:r>
@@ -15819,7 +15515,7 @@
           <a:bodyPr wrap="square" rtlCol="0" anchor="ctr"/>
           <a:lstStyle/>
           <a:p>
-            <a:pPr algn="ctr" indent="0" marL="0">
+            <a:pPr marL="0" indent="0" algn="ctr">
               <a:buNone/>
             </a:pPr>
             <a:r>
@@ -15858,7 +15554,7 @@
           <a:bodyPr wrap="square" rtlCol="0" anchor="ctr"/>
           <a:lstStyle/>
           <a:p>
-            <a:pPr indent="0" marL="0">
+            <a:pPr marL="0" indent="0">
               <a:buNone/>
             </a:pPr>
             <a:r>
@@ -15875,11 +15571,11 @@
             <a:endParaRPr lang="en-US" sz="1800" dirty="0"/>
           </a:p>
           <a:p>
-            <a:pPr indent="0" marL="0">
-              <a:buNone/>
-            </a:pPr>
-            <a:r>
-              <a:rPr lang="en-US" sz="1100" i="1" spc="400" kern="0" dirty="0">
+            <a:pPr marL="0" indent="0">
+              <a:buNone/>
+            </a:pPr>
+            <a:r>
+              <a:rPr lang="en-US" sz="1100" i="1" kern="0" spc="400" dirty="0">
                 <a:solidFill>
                   <a:srgbClr val="8C6810"/>
                 </a:solidFill>
@@ -15914,7 +15610,7 @@
           <a:bodyPr wrap="square" rtlCol="0" anchor="ctr"/>
           <a:lstStyle/>
           <a:p>
-            <a:pPr indent="0" marL="0">
+            <a:pPr marL="0" indent="0">
               <a:buNone/>
             </a:pPr>
             <a:r>
@@ -15978,7 +15674,7 @@
           <a:bodyPr wrap="square" rtlCol="0" anchor="ctr"/>
           <a:lstStyle/>
           <a:p>
-            <a:pPr algn="ctr" indent="0" marL="0">
+            <a:pPr marL="0" indent="0" algn="ctr">
               <a:buNone/>
             </a:pPr>
             <a:r>
@@ -16017,7 +15713,7 @@
           <a:bodyPr wrap="square" rtlCol="0" anchor="ctr"/>
           <a:lstStyle/>
           <a:p>
-            <a:pPr indent="0" marL="0">
+            <a:pPr marL="0" indent="0">
               <a:buNone/>
             </a:pPr>
             <a:r>
@@ -16034,11 +15730,11 @@
             <a:endParaRPr lang="en-US" sz="1800" dirty="0"/>
           </a:p>
           <a:p>
-            <a:pPr indent="0" marL="0">
-              <a:buNone/>
-            </a:pPr>
-            <a:r>
-              <a:rPr lang="en-US" sz="1100" i="1" spc="400" kern="0" dirty="0">
+            <a:pPr marL="0" indent="0">
+              <a:buNone/>
+            </a:pPr>
+            <a:r>
+              <a:rPr lang="en-US" sz="1100" i="1" kern="0" spc="400" dirty="0">
                 <a:solidFill>
                   <a:srgbClr val="8C6810"/>
                 </a:solidFill>
@@ -16073,7 +15769,7 @@
           <a:bodyPr wrap="square" rtlCol="0" anchor="ctr"/>
           <a:lstStyle/>
           <a:p>
-            <a:pPr indent="0" marL="0">
+            <a:pPr marL="0" indent="0">
               <a:buNone/>
             </a:pPr>
             <a:r>
@@ -16112,7 +15808,7 @@
           <a:bodyPr wrap="square" rtlCol="0" anchor="ctr"/>
           <a:lstStyle/>
           <a:p>
-            <a:pPr algn="r" indent="0" marL="0">
+            <a:pPr marL="0" indent="0" algn="r">
               <a:buNone/>
             </a:pPr>
             <a:r>
@@ -16151,7 +15847,7 @@
           <a:bodyPr wrap="square" rtlCol="0" anchor="ctr"/>
           <a:lstStyle/>
           <a:p>
-            <a:pPr indent="0" marL="0">
+            <a:pPr marL="0" indent="0">
               <a:buNone/>
             </a:pPr>
             <a:r>
@@ -16185,6 +15881,7 @@
         <a:solidFill>
           <a:srgbClr val="FFFFFF"/>
         </a:solidFill>
+        <a:effectLst/>
       </p:bgPr>
     </p:bg>
     <p:spTree>
@@ -16222,11 +15919,11 @@
           <a:bodyPr wrap="square" rtlCol="0" anchor="ctr"/>
           <a:lstStyle/>
           <a:p>
-            <a:pPr indent="0" marL="0">
-              <a:buNone/>
-            </a:pPr>
-            <a:r>
-              <a:rPr lang="en-US" sz="1100" b="1" spc="600" kern="0" dirty="0">
+            <a:pPr marL="0" indent="0">
+              <a:buNone/>
+            </a:pPr>
+            <a:r>
+              <a:rPr lang="en-US" sz="1100" b="1" kern="0" spc="600" dirty="0">
                 <a:solidFill>
                   <a:srgbClr val="8C6810"/>
                 </a:solidFill>
@@ -16261,7 +15958,7 @@
           <a:bodyPr wrap="square" rtlCol="0" anchor="ctr"/>
           <a:lstStyle/>
           <a:p>
-            <a:pPr indent="0" marL="0">
+            <a:pPr marL="0" indent="0">
               <a:buNone/>
             </a:pPr>
             <a:r>
@@ -16327,7 +16024,7 @@
           <a:bodyPr wrap="square" rtlCol="0" anchor="ctr"/>
           <a:lstStyle/>
           <a:p>
-            <a:pPr indent="0" marL="0">
+            <a:pPr marL="0" indent="0">
               <a:buNone/>
             </a:pPr>
             <a:r>
@@ -16344,7 +16041,7 @@
             <a:endParaRPr lang="en-US" sz="1300" dirty="0"/>
           </a:p>
           <a:p>
-            <a:pPr indent="0" marL="0">
+            <a:pPr marL="0" indent="0">
               <a:buNone/>
             </a:pPr>
             <a:r>
@@ -16410,7 +16107,7 @@
           <a:bodyPr wrap="square" rtlCol="0" anchor="ctr"/>
           <a:lstStyle/>
           <a:p>
-            <a:pPr indent="0" marL="0">
+            <a:pPr marL="0" indent="0">
               <a:buNone/>
             </a:pPr>
             <a:r>
@@ -16427,7 +16124,7 @@
             <a:endParaRPr lang="en-US" sz="1300" dirty="0"/>
           </a:p>
           <a:p>
-            <a:pPr indent="0" marL="0">
+            <a:pPr marL="0" indent="0">
               <a:buNone/>
             </a:pPr>
             <a:r>
@@ -16493,7 +16190,7 @@
           <a:bodyPr wrap="square" rtlCol="0" anchor="ctr"/>
           <a:lstStyle/>
           <a:p>
-            <a:pPr indent="0" marL="0">
+            <a:pPr marL="0" indent="0">
               <a:buNone/>
             </a:pPr>
             <a:r>
@@ -16510,7 +16207,7 @@
             <a:endParaRPr lang="en-US" sz="1300" dirty="0"/>
           </a:p>
           <a:p>
-            <a:pPr indent="0" marL="0">
+            <a:pPr marL="0" indent="0">
               <a:buNone/>
             </a:pPr>
             <a:r>
@@ -16576,7 +16273,7 @@
           <a:bodyPr wrap="square" rtlCol="0" anchor="ctr"/>
           <a:lstStyle/>
           <a:p>
-            <a:pPr indent="0" marL="0">
+            <a:pPr marL="0" indent="0">
               <a:buNone/>
             </a:pPr>
             <a:r>
@@ -16593,7 +16290,7 @@
             <a:endParaRPr lang="en-US" sz="1300" dirty="0"/>
           </a:p>
           <a:p>
-            <a:pPr indent="0" marL="0">
+            <a:pPr marL="0" indent="0">
               <a:buNone/>
             </a:pPr>
             <a:r>
@@ -16659,7 +16356,7 @@
           <a:bodyPr wrap="square" rtlCol="0" anchor="ctr"/>
           <a:lstStyle/>
           <a:p>
-            <a:pPr indent="0" marL="0">
+            <a:pPr marL="0" indent="0">
               <a:buNone/>
             </a:pPr>
             <a:r>
@@ -16676,7 +16373,7 @@
             <a:endParaRPr lang="en-US" sz="1300" dirty="0"/>
           </a:p>
           <a:p>
-            <a:pPr indent="0" marL="0">
+            <a:pPr marL="0" indent="0">
               <a:buNone/>
             </a:pPr>
             <a:r>
@@ -16742,7 +16439,7 @@
           <a:bodyPr wrap="square" rtlCol="0" anchor="ctr"/>
           <a:lstStyle/>
           <a:p>
-            <a:pPr indent="0" marL="0">
+            <a:pPr marL="0" indent="0">
               <a:buNone/>
             </a:pPr>
             <a:r>
@@ -16759,7 +16456,7 @@
             <a:endParaRPr lang="en-US" sz="1300" dirty="0"/>
           </a:p>
           <a:p>
-            <a:pPr indent="0" marL="0">
+            <a:pPr marL="0" indent="0">
               <a:buNone/>
             </a:pPr>
             <a:r>
@@ -16825,7 +16522,7 @@
           <a:bodyPr wrap="square" rtlCol="0" anchor="ctr"/>
           <a:lstStyle/>
           <a:p>
-            <a:pPr indent="0" marL="0">
+            <a:pPr marL="0" indent="0">
               <a:buNone/>
             </a:pPr>
             <a:r>
@@ -16842,7 +16539,7 @@
             <a:endParaRPr lang="en-US" sz="1300" dirty="0"/>
           </a:p>
           <a:p>
-            <a:pPr indent="0" marL="0">
+            <a:pPr marL="0" indent="0">
               <a:buNone/>
             </a:pPr>
             <a:r>
@@ -16908,7 +16605,7 @@
           <a:bodyPr wrap="square" rtlCol="0" anchor="ctr"/>
           <a:lstStyle/>
           <a:p>
-            <a:pPr indent="0" marL="0">
+            <a:pPr marL="0" indent="0">
               <a:buNone/>
             </a:pPr>
             <a:r>
@@ -16925,7 +16622,7 @@
             <a:endParaRPr lang="en-US" sz="1300" dirty="0"/>
           </a:p>
           <a:p>
-            <a:pPr indent="0" marL="0">
+            <a:pPr marL="0" indent="0">
               <a:buNone/>
             </a:pPr>
             <a:r>
@@ -16991,7 +16688,7 @@
           <a:bodyPr wrap="square" rtlCol="0" anchor="ctr"/>
           <a:lstStyle/>
           <a:p>
-            <a:pPr indent="0" marL="0">
+            <a:pPr marL="0" indent="0">
               <a:buNone/>
             </a:pPr>
             <a:r>
@@ -17008,7 +16705,7 @@
             <a:endParaRPr lang="en-US" sz="1300" dirty="0"/>
           </a:p>
           <a:p>
-            <a:pPr indent="0" marL="0">
+            <a:pPr marL="0" indent="0">
               <a:buNone/>
             </a:pPr>
             <a:r>
@@ -17074,7 +16771,7 @@
           <a:bodyPr wrap="square" rtlCol="0" anchor="ctr"/>
           <a:lstStyle/>
           <a:p>
-            <a:pPr indent="0" marL="0">
+            <a:pPr marL="0" indent="0">
               <a:buNone/>
             </a:pPr>
             <a:r>
@@ -17091,7 +16788,7 @@
             <a:endParaRPr lang="en-US" sz="1300" dirty="0"/>
           </a:p>
           <a:p>
-            <a:pPr indent="0" marL="0">
+            <a:pPr marL="0" indent="0">
               <a:buNone/>
             </a:pPr>
             <a:r>
@@ -17157,7 +16854,7 @@
           <a:bodyPr wrap="square" rtlCol="0" anchor="ctr"/>
           <a:lstStyle/>
           <a:p>
-            <a:pPr indent="0" marL="0">
+            <a:pPr marL="0" indent="0">
               <a:buNone/>
             </a:pPr>
             <a:r>
@@ -17174,7 +16871,7 @@
             <a:endParaRPr lang="en-US" sz="1300" dirty="0"/>
           </a:p>
           <a:p>
-            <a:pPr indent="0" marL="0">
+            <a:pPr marL="0" indent="0">
               <a:buNone/>
             </a:pPr>
             <a:r>
@@ -17240,7 +16937,7 @@
           <a:bodyPr wrap="square" rtlCol="0" anchor="ctr"/>
           <a:lstStyle/>
           <a:p>
-            <a:pPr indent="0" marL="0">
+            <a:pPr marL="0" indent="0">
               <a:buNone/>
             </a:pPr>
             <a:r>
@@ -17257,7 +16954,7 @@
             <a:endParaRPr lang="en-US" sz="1300" dirty="0"/>
           </a:p>
           <a:p>
-            <a:pPr indent="0" marL="0">
+            <a:pPr marL="0" indent="0">
               <a:buNone/>
             </a:pPr>
             <a:r>
@@ -17296,7 +16993,7 @@
           <a:bodyPr wrap="square" rtlCol="0" anchor="ctr"/>
           <a:lstStyle/>
           <a:p>
-            <a:pPr algn="ctr" indent="0" marL="0">
+            <a:pPr marL="0" indent="0" algn="ctr">
               <a:buNone/>
             </a:pPr>
             <a:r>
@@ -17335,7 +17032,7 @@
           <a:bodyPr wrap="square" rtlCol="0" anchor="ctr"/>
           <a:lstStyle/>
           <a:p>
-            <a:pPr algn="r" indent="0" marL="0">
+            <a:pPr marL="0" indent="0" algn="r">
               <a:buNone/>
             </a:pPr>
             <a:r>
@@ -17374,7 +17071,7 @@
           <a:bodyPr wrap="square" rtlCol="0" anchor="ctr"/>
           <a:lstStyle/>
           <a:p>
-            <a:pPr indent="0" marL="0">
+            <a:pPr marL="0" indent="0">
               <a:buNone/>
             </a:pPr>
             <a:r>
@@ -17408,6 +17105,7 @@
         <a:solidFill>
           <a:srgbClr val="FFFFFF"/>
         </a:solidFill>
+        <a:effectLst/>
       </p:bgPr>
     </p:bg>
     <p:spTree>
@@ -17445,11 +17143,11 @@
           <a:bodyPr wrap="square" rtlCol="0" anchor="ctr"/>
           <a:lstStyle/>
           <a:p>
-            <a:pPr indent="0" marL="0">
-              <a:buNone/>
-            </a:pPr>
-            <a:r>
-              <a:rPr lang="en-US" sz="1100" b="1" spc="600" kern="0" dirty="0">
+            <a:pPr marL="0" indent="0">
+              <a:buNone/>
+            </a:pPr>
+            <a:r>
+              <a:rPr lang="en-US" sz="1100" b="1" kern="0" spc="600" dirty="0">
                 <a:solidFill>
                   <a:srgbClr val="8C6810"/>
                 </a:solidFill>
@@ -17484,7 +17182,7 @@
           <a:bodyPr wrap="square" rtlCol="0" anchor="ctr"/>
           <a:lstStyle/>
           <a:p>
-            <a:pPr indent="0" marL="0">
+            <a:pPr marL="0" indent="0">
               <a:buNone/>
             </a:pPr>
             <a:r>
@@ -17550,7 +17248,7 @@
           <a:bodyPr wrap="square" rtlCol="0" anchor="ctr"/>
           <a:lstStyle/>
           <a:p>
-            <a:pPr algn="ctr" indent="0" marL="0">
+            <a:pPr marL="0" indent="0" algn="ctr">
               <a:buNone/>
             </a:pPr>
             <a:r>
@@ -17586,7 +17284,7 @@
           <a:bodyPr wrap="square" rtlCol="0" anchor="ctr"/>
           <a:lstStyle/>
           <a:p>
-            <a:pPr algn="ctr" indent="0" marL="0">
+            <a:pPr marL="0" indent="0" algn="ctr">
               <a:buNone/>
             </a:pPr>
             <a:r>
@@ -17622,7 +17320,7 @@
           <a:bodyPr wrap="square" rtlCol="0" anchor="ctr"/>
           <a:lstStyle/>
           <a:p>
-            <a:pPr algn="ctr" indent="0" marL="0">
+            <a:pPr marL="0" indent="0" algn="ctr">
               <a:buNone/>
             </a:pPr>
             <a:r>
@@ -17685,7 +17383,7 @@
           <a:bodyPr wrap="square" rtlCol="0" anchor="ctr"/>
           <a:lstStyle/>
           <a:p>
-            <a:pPr algn="ctr" indent="0" marL="0">
+            <a:pPr marL="0" indent="0" algn="ctr">
               <a:buNone/>
             </a:pPr>
             <a:r>
@@ -17721,7 +17419,7 @@
           <a:bodyPr wrap="square" rtlCol="0" anchor="ctr"/>
           <a:lstStyle/>
           <a:p>
-            <a:pPr algn="ctr" indent="0" marL="0">
+            <a:pPr marL="0" indent="0" algn="ctr">
               <a:buNone/>
             </a:pPr>
             <a:r>
@@ -17757,7 +17455,7 @@
           <a:bodyPr wrap="square" rtlCol="0" anchor="ctr"/>
           <a:lstStyle/>
           <a:p>
-            <a:pPr algn="ctr" indent="0" marL="0">
+            <a:pPr marL="0" indent="0" algn="ctr">
               <a:buNone/>
             </a:pPr>
             <a:r>
@@ -17820,7 +17518,7 @@
           <a:bodyPr wrap="square" rtlCol="0" anchor="ctr"/>
           <a:lstStyle/>
           <a:p>
-            <a:pPr algn="ctr" indent="0" marL="0">
+            <a:pPr marL="0" indent="0" algn="ctr">
               <a:buNone/>
             </a:pPr>
             <a:r>
@@ -17856,7 +17554,7 @@
           <a:bodyPr wrap="square" rtlCol="0" anchor="ctr"/>
           <a:lstStyle/>
           <a:p>
-            <a:pPr algn="ctr" indent="0" marL="0">
+            <a:pPr marL="0" indent="0" algn="ctr">
               <a:buNone/>
             </a:pPr>
             <a:r>
@@ -17892,7 +17590,7 @@
           <a:bodyPr wrap="square" rtlCol="0" anchor="ctr"/>
           <a:lstStyle/>
           <a:p>
-            <a:pPr algn="ctr" indent="0" marL="0">
+            <a:pPr marL="0" indent="0" algn="ctr">
               <a:buNone/>
             </a:pPr>
             <a:r>
@@ -17955,7 +17653,7 @@
           <a:bodyPr wrap="square" rtlCol="0" anchor="ctr"/>
           <a:lstStyle/>
           <a:p>
-            <a:pPr algn="ctr" indent="0" marL="0">
+            <a:pPr marL="0" indent="0" algn="ctr">
               <a:buNone/>
             </a:pPr>
             <a:r>
@@ -17991,7 +17689,7 @@
           <a:bodyPr wrap="square" rtlCol="0" anchor="ctr"/>
           <a:lstStyle/>
           <a:p>
-            <a:pPr algn="ctr" indent="0" marL="0">
+            <a:pPr marL="0" indent="0" algn="ctr">
               <a:buNone/>
             </a:pPr>
             <a:r>
@@ -18027,7 +17725,7 @@
           <a:bodyPr wrap="square" rtlCol="0" anchor="ctr"/>
           <a:lstStyle/>
           <a:p>
-            <a:pPr algn="ctr" indent="0" marL="0">
+            <a:pPr marL="0" indent="0" algn="ctr">
               <a:buNone/>
             </a:pPr>
             <a:r>
@@ -18090,7 +17788,7 @@
           <a:bodyPr wrap="square" rtlCol="0" anchor="ctr"/>
           <a:lstStyle/>
           <a:p>
-            <a:pPr algn="ctr" indent="0" marL="0">
+            <a:pPr marL="0" indent="0" algn="ctr">
               <a:buNone/>
             </a:pPr>
             <a:r>
@@ -18126,7 +17824,7 @@
           <a:bodyPr wrap="square" rtlCol="0" anchor="ctr"/>
           <a:lstStyle/>
           <a:p>
-            <a:pPr algn="ctr" indent="0" marL="0">
+            <a:pPr marL="0" indent="0" algn="ctr">
               <a:buNone/>
             </a:pPr>
             <a:r>
@@ -18162,7 +17860,7 @@
           <a:bodyPr wrap="square" rtlCol="0" anchor="ctr"/>
           <a:lstStyle/>
           <a:p>
-            <a:pPr algn="ctr" indent="0" marL="0">
+            <a:pPr marL="0" indent="0" algn="ctr">
               <a:buNone/>
             </a:pPr>
             <a:r>
@@ -18225,7 +17923,7 @@
           <a:bodyPr wrap="square" rtlCol="0" anchor="ctr"/>
           <a:lstStyle/>
           <a:p>
-            <a:pPr algn="ctr" indent="0" marL="0">
+            <a:pPr marL="0" indent="0" algn="ctr">
               <a:buNone/>
             </a:pPr>
             <a:r>
@@ -18261,7 +17959,7 @@
           <a:bodyPr wrap="square" rtlCol="0" anchor="ctr"/>
           <a:lstStyle/>
           <a:p>
-            <a:pPr algn="ctr" indent="0" marL="0">
+            <a:pPr marL="0" indent="0" algn="ctr">
               <a:buNone/>
             </a:pPr>
             <a:r>
@@ -18297,7 +17995,7 @@
           <a:bodyPr wrap="square" rtlCol="0" anchor="ctr"/>
           <a:lstStyle/>
           <a:p>
-            <a:pPr algn="ctr" indent="0" marL="0">
+            <a:pPr marL="0" indent="0" algn="ctr">
               <a:buNone/>
             </a:pPr>
             <a:r>
@@ -18360,7 +18058,7 @@
           <a:bodyPr wrap="square" rtlCol="0" anchor="ctr"/>
           <a:lstStyle/>
           <a:p>
-            <a:pPr algn="ctr" indent="0" marL="0">
+            <a:pPr marL="0" indent="0" algn="ctr">
               <a:buNone/>
             </a:pPr>
             <a:r>
@@ -18396,7 +18094,7 @@
           <a:bodyPr wrap="square" rtlCol="0" anchor="ctr"/>
           <a:lstStyle/>
           <a:p>
-            <a:pPr algn="ctr" indent="0" marL="0">
+            <a:pPr marL="0" indent="0" algn="ctr">
               <a:buNone/>
             </a:pPr>
             <a:r>
@@ -18432,7 +18130,7 @@
           <a:bodyPr wrap="square" rtlCol="0" anchor="ctr"/>
           <a:lstStyle/>
           <a:p>
-            <a:pPr algn="ctr" indent="0" marL="0">
+            <a:pPr marL="0" indent="0" algn="ctr">
               <a:buNone/>
             </a:pPr>
             <a:r>
@@ -18468,7 +18166,7 @@
           <a:bodyPr wrap="square" rtlCol="0" anchor="ctr"/>
           <a:lstStyle/>
           <a:p>
-            <a:pPr algn="ctr" indent="0" marL="0">
+            <a:pPr marL="0" indent="0" algn="ctr">
               <a:buNone/>
             </a:pPr>
             <a:r>
@@ -18507,7 +18205,7 @@
           <a:bodyPr wrap="square" rtlCol="0" anchor="ctr"/>
           <a:lstStyle/>
           <a:p>
-            <a:pPr algn="ctr" indent="0" marL="0">
+            <a:pPr marL="0" indent="0" algn="ctr">
               <a:buNone/>
             </a:pPr>
             <a:r>
@@ -18546,7 +18244,7 @@
           <a:bodyPr wrap="square" rtlCol="0" anchor="ctr"/>
           <a:lstStyle/>
           <a:p>
-            <a:pPr algn="r" indent="0" marL="0">
+            <a:pPr marL="0" indent="0" algn="r">
               <a:buNone/>
             </a:pPr>
             <a:r>
@@ -18585,7 +18283,7 @@
           <a:bodyPr wrap="square" rtlCol="0" anchor="ctr"/>
           <a:lstStyle/>
           <a:p>
-            <a:pPr indent="0" marL="0">
+            <a:pPr marL="0" indent="0">
               <a:buNone/>
             </a:pPr>
             <a:r>
@@ -18619,6 +18317,7 @@
         <a:solidFill>
           <a:srgbClr val="FFFFFF"/>
         </a:solidFill>
+        <a:effectLst/>
       </p:bgPr>
     </p:bg>
     <p:spTree>
@@ -18656,11 +18355,11 @@
           <a:bodyPr wrap="square" rtlCol="0" anchor="ctr"/>
           <a:lstStyle/>
           <a:p>
-            <a:pPr indent="0" marL="0">
-              <a:buNone/>
-            </a:pPr>
-            <a:r>
-              <a:rPr lang="en-US" sz="1100" b="1" spc="600" kern="0" dirty="0">
+            <a:pPr marL="0" indent="0">
+              <a:buNone/>
+            </a:pPr>
+            <a:r>
+              <a:rPr lang="en-US" sz="1100" b="1" kern="0" spc="600" dirty="0">
                 <a:solidFill>
                   <a:srgbClr val="8C6810"/>
                 </a:solidFill>
@@ -18695,7 +18394,7 @@
           <a:bodyPr wrap="square" rtlCol="0" anchor="ctr"/>
           <a:lstStyle/>
           <a:p>
-            <a:pPr indent="0" marL="0">
+            <a:pPr marL="0" indent="0">
               <a:buNone/>
             </a:pPr>
             <a:r>
@@ -18734,7 +18433,7 @@
           <a:bodyPr wrap="square" rtlCol="0" anchor="ctr"/>
           <a:lstStyle/>
           <a:p>
-            <a:pPr indent="0" marL="0">
+            <a:pPr marL="0" indent="0">
               <a:buNone/>
             </a:pPr>
             <a:r>
@@ -18800,7 +18499,7 @@
           <a:bodyPr wrap="square" rtlCol="0" anchor="ctr"/>
           <a:lstStyle/>
           <a:p>
-            <a:pPr algn="ctr" indent="0" marL="0">
+            <a:pPr marL="0" indent="0" algn="ctr">
               <a:buNone/>
             </a:pPr>
             <a:r>
@@ -18866,7 +18565,7 @@
           <a:bodyPr wrap="square" rtlCol="0" anchor="ctr"/>
           <a:lstStyle/>
           <a:p>
-            <a:pPr algn="ctr" indent="0" marL="0">
+            <a:pPr marL="0" indent="0" algn="ctr">
               <a:buNone/>
             </a:pPr>
             <a:r>
@@ -18932,7 +18631,7 @@
           <a:bodyPr wrap="square" rtlCol="0" anchor="ctr"/>
           <a:lstStyle/>
           <a:p>
-            <a:pPr algn="ctr" indent="0" marL="0">
+            <a:pPr marL="0" indent="0" algn="ctr">
               <a:buNone/>
             </a:pPr>
             <a:r>
@@ -18998,7 +18697,7 @@
           <a:bodyPr wrap="square" rtlCol="0" anchor="ctr"/>
           <a:lstStyle/>
           <a:p>
-            <a:pPr algn="ctr" indent="0" marL="0">
+            <a:pPr marL="0" indent="0" algn="ctr">
               <a:buNone/>
             </a:pPr>
             <a:r>
@@ -19064,7 +18763,7 @@
           <a:bodyPr wrap="square" rtlCol="0" anchor="ctr"/>
           <a:lstStyle/>
           <a:p>
-            <a:pPr algn="ctr" indent="0" marL="0">
+            <a:pPr marL="0" indent="0" algn="ctr">
               <a:buNone/>
             </a:pPr>
             <a:r>
@@ -19130,7 +18829,7 @@
           <a:bodyPr wrap="square" rtlCol="0" anchor="ctr"/>
           <a:lstStyle/>
           <a:p>
-            <a:pPr algn="ctr" indent="0" marL="0">
+            <a:pPr marL="0" indent="0" algn="ctr">
               <a:buNone/>
             </a:pPr>
             <a:r>
@@ -19196,7 +18895,7 @@
           <a:bodyPr wrap="square" rtlCol="0" anchor="ctr"/>
           <a:lstStyle/>
           <a:p>
-            <a:pPr algn="ctr" indent="0" marL="0">
+            <a:pPr marL="0" indent="0" algn="ctr">
               <a:buNone/>
             </a:pPr>
             <a:r>
@@ -19262,7 +18961,7 @@
           <a:bodyPr wrap="square" rtlCol="0" anchor="ctr"/>
           <a:lstStyle/>
           <a:p>
-            <a:pPr algn="ctr" indent="0" marL="0">
+            <a:pPr marL="0" indent="0" algn="ctr">
               <a:buNone/>
             </a:pPr>
             <a:r>
@@ -19328,7 +19027,7 @@
           <a:bodyPr wrap="square" rtlCol="0" anchor="ctr"/>
           <a:lstStyle/>
           <a:p>
-            <a:pPr algn="ctr" indent="0" marL="0">
+            <a:pPr marL="0" indent="0" algn="ctr">
               <a:buNone/>
             </a:pPr>
             <a:r>
@@ -19394,7 +19093,7 @@
           <a:bodyPr wrap="square" rtlCol="0" anchor="ctr"/>
           <a:lstStyle/>
           <a:p>
-            <a:pPr algn="ctr" indent="0" marL="0">
+            <a:pPr marL="0" indent="0" algn="ctr">
               <a:buNone/>
             </a:pPr>
             <a:r>
@@ -19460,7 +19159,7 @@
           <a:bodyPr wrap="square" rtlCol="0" anchor="ctr"/>
           <a:lstStyle/>
           <a:p>
-            <a:pPr algn="ctr" indent="0" marL="0">
+            <a:pPr marL="0" indent="0" algn="ctr">
               <a:buNone/>
             </a:pPr>
             <a:r>
@@ -19526,7 +19225,7 @@
           <a:bodyPr wrap="square" rtlCol="0" anchor="ctr"/>
           <a:lstStyle/>
           <a:p>
-            <a:pPr algn="ctr" indent="0" marL="0">
+            <a:pPr marL="0" indent="0" algn="ctr">
               <a:buNone/>
             </a:pPr>
             <a:r>
@@ -19565,7 +19264,7 @@
           <a:bodyPr wrap="square" rtlCol="0" anchor="ctr"/>
           <a:lstStyle/>
           <a:p>
-            <a:pPr indent="0" marL="0">
+            <a:pPr marL="0" indent="0">
               <a:buNone/>
             </a:pPr>
             <a:r>
@@ -19631,7 +19330,7 @@
           <a:bodyPr wrap="square" rtlCol="0" anchor="ctr"/>
           <a:lstStyle/>
           <a:p>
-            <a:pPr algn="ctr" indent="0" marL="0">
+            <a:pPr marL="0" indent="0" algn="ctr">
               <a:buNone/>
             </a:pPr>
             <a:r>
@@ -19667,7 +19366,7 @@
           <a:bodyPr wrap="square" rtlCol="0" anchor="ctr"/>
           <a:lstStyle/>
           <a:p>
-            <a:pPr algn="ctr" indent="0" marL="0">
+            <a:pPr marL="0" indent="0" algn="ctr">
               <a:buNone/>
             </a:pPr>
             <a:r>
@@ -19706,7 +19405,7 @@
           <a:bodyPr wrap="square" rtlCol="0" anchor="ctr"/>
           <a:lstStyle/>
           <a:p>
-            <a:pPr algn="ctr" indent="0" marL="0">
+            <a:pPr marL="0" indent="0" algn="ctr">
               <a:buNone/>
             </a:pPr>
             <a:r>
@@ -19772,7 +19471,7 @@
           <a:bodyPr wrap="square" rtlCol="0" anchor="ctr"/>
           <a:lstStyle/>
           <a:p>
-            <a:pPr algn="ctr" indent="0" marL="0">
+            <a:pPr marL="0" indent="0" algn="ctr">
               <a:buNone/>
             </a:pPr>
             <a:r>
@@ -19808,7 +19507,7 @@
           <a:bodyPr wrap="square" rtlCol="0" anchor="ctr"/>
           <a:lstStyle/>
           <a:p>
-            <a:pPr algn="ctr" indent="0" marL="0">
+            <a:pPr marL="0" indent="0" algn="ctr">
               <a:buNone/>
             </a:pPr>
             <a:r>
@@ -19847,7 +19546,7 @@
           <a:bodyPr wrap="square" rtlCol="0" anchor="ctr"/>
           <a:lstStyle/>
           <a:p>
-            <a:pPr algn="ctr" indent="0" marL="0">
+            <a:pPr marL="0" indent="0" algn="ctr">
               <a:buNone/>
             </a:pPr>
             <a:r>
@@ -19913,7 +19612,7 @@
           <a:bodyPr wrap="square" rtlCol="0" anchor="ctr"/>
           <a:lstStyle/>
           <a:p>
-            <a:pPr algn="ctr" indent="0" marL="0">
+            <a:pPr marL="0" indent="0" algn="ctr">
               <a:buNone/>
             </a:pPr>
             <a:r>
@@ -19949,7 +19648,7 @@
           <a:bodyPr wrap="square" rtlCol="0" anchor="ctr"/>
           <a:lstStyle/>
           <a:p>
-            <a:pPr algn="ctr" indent="0" marL="0">
+            <a:pPr marL="0" indent="0" algn="ctr">
               <a:buNone/>
             </a:pPr>
             <a:r>
@@ -19988,7 +19687,7 @@
           <a:bodyPr wrap="square" rtlCol="0" anchor="ctr"/>
           <a:lstStyle/>
           <a:p>
-            <a:pPr algn="ctr" indent="0" marL="0">
+            <a:pPr marL="0" indent="0" algn="ctr">
               <a:buNone/>
             </a:pPr>
             <a:r>
@@ -20054,7 +19753,7 @@
           <a:bodyPr wrap="square" rtlCol="0" anchor="ctr"/>
           <a:lstStyle/>
           <a:p>
-            <a:pPr algn="ctr" indent="0" marL="0">
+            <a:pPr marL="0" indent="0" algn="ctr">
               <a:buNone/>
             </a:pPr>
             <a:r>
@@ -20090,7 +19789,7 @@
           <a:bodyPr wrap="square" rtlCol="0" anchor="ctr"/>
           <a:lstStyle/>
           <a:p>
-            <a:pPr algn="ctr" indent="0" marL="0">
+            <a:pPr marL="0" indent="0" algn="ctr">
               <a:buNone/>
             </a:pPr>
             <a:r>
@@ -20129,7 +19828,7 @@
           <a:bodyPr wrap="square" rtlCol="0" anchor="ctr"/>
           <a:lstStyle/>
           <a:p>
-            <a:pPr algn="ctr" indent="0" marL="0">
+            <a:pPr marL="0" indent="0" algn="ctr">
               <a:buNone/>
             </a:pPr>
             <a:r>
@@ -20168,7 +19867,7 @@
           <a:bodyPr wrap="square" rtlCol="0" anchor="ctr"/>
           <a:lstStyle/>
           <a:p>
-            <a:pPr algn="r" indent="0" marL="0">
+            <a:pPr marL="0" indent="0" algn="r">
               <a:buNone/>
             </a:pPr>
             <a:r>
@@ -20207,7 +19906,7 @@
           <a:bodyPr wrap="square" rtlCol="0" anchor="ctr"/>
           <a:lstStyle/>
           <a:p>
-            <a:pPr indent="0" marL="0">
+            <a:pPr marL="0" indent="0">
               <a:buNone/>
             </a:pPr>
             <a:r>
@@ -20241,6 +19940,7 @@
         <a:solidFill>
           <a:srgbClr val="FFFFFF"/>
         </a:solidFill>
+        <a:effectLst/>
       </p:bgPr>
     </p:bg>
     <p:spTree>
@@ -20278,11 +19978,11 @@
           <a:bodyPr wrap="square" rtlCol="0" anchor="ctr"/>
           <a:lstStyle/>
           <a:p>
-            <a:pPr indent="0" marL="0">
-              <a:buNone/>
-            </a:pPr>
-            <a:r>
-              <a:rPr lang="en-US" sz="1100" b="1" spc="600" kern="0" dirty="0">
+            <a:pPr marL="0" indent="0">
+              <a:buNone/>
+            </a:pPr>
+            <a:r>
+              <a:rPr lang="en-US" sz="1100" b="1" kern="0" spc="600" dirty="0">
                 <a:solidFill>
                   <a:srgbClr val="8C6810"/>
                 </a:solidFill>
@@ -20317,7 +20017,7 @@
           <a:bodyPr wrap="square" rtlCol="0" anchor="ctr"/>
           <a:lstStyle/>
           <a:p>
-            <a:pPr indent="0" marL="0">
+            <a:pPr marL="0" indent="0">
               <a:buNone/>
             </a:pPr>
             <a:r>
@@ -20383,11 +20083,11 @@
           <a:bodyPr wrap="square" rtlCol="0" anchor="ctr"/>
           <a:lstStyle/>
           <a:p>
-            <a:pPr indent="0" marL="0">
-              <a:buNone/>
-            </a:pPr>
-            <a:r>
-              <a:rPr lang="en-US" sz="1100" b="1" spc="800" kern="0" dirty="0">
+            <a:pPr marL="0" indent="0">
+              <a:buNone/>
+            </a:pPr>
+            <a:r>
+              <a:rPr lang="en-US" sz="1100" b="1" kern="0" spc="800" dirty="0">
                 <a:solidFill>
                   <a:srgbClr val="DAA520"/>
                 </a:solidFill>
@@ -20422,7 +20122,7 @@
           <a:bodyPr wrap="square" rtlCol="0" anchor="ctr"/>
           <a:lstStyle/>
           <a:p>
-            <a:pPr algn="ctr" indent="0" marL="0">
+            <a:pPr marL="0" indent="0" algn="ctr">
               <a:buNone/>
             </a:pPr>
             <a:r>
@@ -20461,7 +20161,7 @@
           <a:bodyPr wrap="square" rtlCol="0" anchor="ctr"/>
           <a:lstStyle/>
           <a:p>
-            <a:pPr algn="ctr" indent="0" marL="0">
+            <a:pPr marL="0" indent="0" algn="ctr">
               <a:buNone/>
             </a:pPr>
             <a:r>
@@ -20500,7 +20200,7 @@
           <a:bodyPr wrap="square" rtlCol="0" anchor="ctr"/>
           <a:lstStyle/>
           <a:p>
-            <a:pPr algn="ctr" indent="0" marL="0">
+            <a:pPr marL="0" indent="0" algn="ctr">
               <a:buNone/>
             </a:pPr>
             <a:r>
@@ -20566,7 +20266,7 @@
           <a:bodyPr wrap="square" rtlCol="0" anchor="ctr"/>
           <a:lstStyle/>
           <a:p>
-            <a:pPr algn="ctr" indent="0" marL="0">
+            <a:pPr marL="0" indent="0" algn="ctr">
               <a:buNone/>
             </a:pPr>
             <a:r>
@@ -20605,11 +20305,11 @@
           <a:bodyPr wrap="square" rtlCol="0" anchor="ctr"/>
           <a:lstStyle/>
           <a:p>
-            <a:pPr algn="ctr" indent="0" marL="0">
-              <a:buNone/>
-            </a:pPr>
-            <a:r>
-              <a:rPr lang="en-US" sz="1000" spc="400" kern="0" dirty="0">
+            <a:pPr marL="0" indent="0" algn="ctr">
+              <a:buNone/>
+            </a:pPr>
+            <a:r>
+              <a:rPr lang="en-US" sz="1000" kern="0" spc="400" dirty="0">
                 <a:solidFill>
                   <a:srgbClr val="6F6F65"/>
                 </a:solidFill>
@@ -20671,7 +20371,7 @@
           <a:bodyPr wrap="square" rtlCol="0" anchor="ctr"/>
           <a:lstStyle/>
           <a:p>
-            <a:pPr algn="ctr" indent="0" marL="0">
+            <a:pPr marL="0" indent="0" algn="ctr">
               <a:buNone/>
             </a:pPr>
             <a:r>
@@ -20710,11 +20410,11 @@
           <a:bodyPr wrap="square" rtlCol="0" anchor="ctr"/>
           <a:lstStyle/>
           <a:p>
-            <a:pPr algn="ctr" indent="0" marL="0">
-              <a:buNone/>
-            </a:pPr>
-            <a:r>
-              <a:rPr lang="en-US" sz="1000" spc="400" kern="0" dirty="0">
+            <a:pPr marL="0" indent="0" algn="ctr">
+              <a:buNone/>
+            </a:pPr>
+            <a:r>
+              <a:rPr lang="en-US" sz="1000" kern="0" spc="400" dirty="0">
                 <a:solidFill>
                   <a:srgbClr val="6F6F65"/>
                 </a:solidFill>
@@ -20776,7 +20476,7 @@
           <a:bodyPr wrap="square" rtlCol="0" anchor="ctr"/>
           <a:lstStyle/>
           <a:p>
-            <a:pPr algn="ctr" indent="0" marL="0">
+            <a:pPr marL="0" indent="0" algn="ctr">
               <a:buNone/>
             </a:pPr>
             <a:r>
@@ -20815,11 +20515,11 @@
           <a:bodyPr wrap="square" rtlCol="0" anchor="ctr"/>
           <a:lstStyle/>
           <a:p>
-            <a:pPr algn="ctr" indent="0" marL="0">
-              <a:buNone/>
-            </a:pPr>
-            <a:r>
-              <a:rPr lang="en-US" sz="1000" spc="400" kern="0" dirty="0">
+            <a:pPr marL="0" indent="0" algn="ctr">
+              <a:buNone/>
+            </a:pPr>
+            <a:r>
+              <a:rPr lang="en-US" sz="1000" kern="0" spc="400" dirty="0">
                 <a:solidFill>
                   <a:srgbClr val="6F6F65"/>
                 </a:solidFill>
@@ -20881,7 +20581,7 @@
           <a:bodyPr wrap="square" rtlCol="0" anchor="ctr"/>
           <a:lstStyle/>
           <a:p>
-            <a:pPr algn="ctr" indent="0" marL="0">
+            <a:pPr marL="0" indent="0" algn="ctr">
               <a:buNone/>
             </a:pPr>
             <a:r>
@@ -20920,11 +20620,11 @@
           <a:bodyPr wrap="square" rtlCol="0" anchor="ctr"/>
           <a:lstStyle/>
           <a:p>
-            <a:pPr algn="ctr" indent="0" marL="0">
-              <a:buNone/>
-            </a:pPr>
-            <a:r>
-              <a:rPr lang="en-US" sz="1000" spc="400" kern="0" dirty="0">
+            <a:pPr marL="0" indent="0" algn="ctr">
+              <a:buNone/>
+            </a:pPr>
+            <a:r>
+              <a:rPr lang="en-US" sz="1000" kern="0" spc="400" dirty="0">
                 <a:solidFill>
                   <a:srgbClr val="6F6F65"/>
                 </a:solidFill>
@@ -20959,7 +20659,7 @@
           <a:bodyPr wrap="square" rtlCol="0" anchor="ctr"/>
           <a:lstStyle/>
           <a:p>
-            <a:pPr algn="r" indent="0" marL="0">
+            <a:pPr marL="0" indent="0" algn="r">
               <a:buNone/>
             </a:pPr>
             <a:r>
@@ -20998,7 +20698,7 @@
           <a:bodyPr wrap="square" rtlCol="0" anchor="ctr"/>
           <a:lstStyle/>
           <a:p>
-            <a:pPr indent="0" marL="0">
+            <a:pPr marL="0" indent="0">
               <a:buNone/>
             </a:pPr>
             <a:r>
@@ -21032,6 +20732,7 @@
         <a:solidFill>
           <a:srgbClr val="0E0E0E"/>
         </a:solidFill>
+        <a:effectLst/>
       </p:bgPr>
     </p:bg>
     <p:spTree>
@@ -21069,11 +20770,11 @@
           <a:bodyPr wrap="square" rtlCol="0" anchor="ctr"/>
           <a:lstStyle/>
           <a:p>
-            <a:pPr indent="0" marL="0">
-              <a:buNone/>
-            </a:pPr>
-            <a:r>
-              <a:rPr lang="en-US" sz="1100" b="1" spc="600" kern="0" dirty="0">
+            <a:pPr marL="0" indent="0">
+              <a:buNone/>
+            </a:pPr>
+            <a:r>
+              <a:rPr lang="en-US" sz="1100" b="1" kern="0" spc="600" dirty="0">
                 <a:solidFill>
                   <a:srgbClr val="DAA520"/>
                 </a:solidFill>
@@ -21108,7 +20809,7 @@
           <a:bodyPr wrap="square" rtlCol="0" anchor="ctr"/>
           <a:lstStyle/>
           <a:p>
-            <a:pPr indent="0" marL="0">
+            <a:pPr marL="0" indent="0">
               <a:buNone/>
             </a:pPr>
             <a:r>
@@ -21201,11 +20902,11 @@
           <a:bodyPr wrap="square" rtlCol="0" anchor="ctr"/>
           <a:lstStyle/>
           <a:p>
-            <a:pPr indent="0" marL="0">
-              <a:buNone/>
-            </a:pPr>
-            <a:r>
-              <a:rPr lang="en-US" sz="1100" b="1" spc="800" kern="0" dirty="0">
+            <a:pPr marL="0" indent="0">
+              <a:buNone/>
+            </a:pPr>
+            <a:r>
+              <a:rPr lang="en-US" sz="1100" b="1" kern="0" spc="800" dirty="0">
                 <a:solidFill>
                   <a:srgbClr val="DAA520"/>
                 </a:solidFill>
@@ -21240,7 +20941,7 @@
           <a:bodyPr wrap="square" rtlCol="0" anchor="ctr"/>
           <a:lstStyle/>
           <a:p>
-            <a:pPr indent="0" marL="0">
+            <a:pPr marL="0" indent="0">
               <a:buNone/>
             </a:pPr>
             <a:r>
@@ -21306,7 +21007,7 @@
           <a:bodyPr wrap="square" rtlCol="0" anchor="ctr"/>
           <a:lstStyle/>
           <a:p>
-            <a:pPr algn="ctr" indent="0" marL="0">
+            <a:pPr marL="0" indent="0" algn="ctr">
               <a:buNone/>
             </a:pPr>
             <a:r>
@@ -21372,7 +21073,7 @@
           <a:bodyPr wrap="square" rtlCol="0" anchor="ctr"/>
           <a:lstStyle/>
           <a:p>
-            <a:pPr algn="ctr" indent="0" marL="0">
+            <a:pPr marL="0" indent="0" algn="ctr">
               <a:buNone/>
             </a:pPr>
             <a:r>
@@ -21438,7 +21139,7 @@
           <a:bodyPr wrap="square" rtlCol="0" anchor="ctr"/>
           <a:lstStyle/>
           <a:p>
-            <a:pPr algn="ctr" indent="0" marL="0">
+            <a:pPr marL="0" indent="0" algn="ctr">
               <a:buNone/>
             </a:pPr>
             <a:r>
@@ -21504,7 +21205,7 @@
           <a:bodyPr wrap="square" rtlCol="0" anchor="ctr"/>
           <a:lstStyle/>
           <a:p>
-            <a:pPr algn="ctr" indent="0" marL="0">
+            <a:pPr marL="0" indent="0" algn="ctr">
               <a:buNone/>
             </a:pPr>
             <a:r>
@@ -21570,7 +21271,7 @@
           <a:bodyPr wrap="square" rtlCol="0" anchor="ctr"/>
           <a:lstStyle/>
           <a:p>
-            <a:pPr algn="ctr" indent="0" marL="0">
+            <a:pPr marL="0" indent="0" algn="ctr">
               <a:buNone/>
             </a:pPr>
             <a:r>
@@ -21636,7 +21337,7 @@
           <a:bodyPr wrap="square" rtlCol="0" anchor="ctr"/>
           <a:lstStyle/>
           <a:p>
-            <a:pPr algn="ctr" indent="0" marL="0">
+            <a:pPr marL="0" indent="0" algn="ctr">
               <a:buNone/>
             </a:pPr>
             <a:r>
@@ -21702,7 +21403,7 @@
           <a:bodyPr wrap="square" rtlCol="0" anchor="ctr"/>
           <a:lstStyle/>
           <a:p>
-            <a:pPr algn="ctr" indent="0" marL="0">
+            <a:pPr marL="0" indent="0" algn="ctr">
               <a:buNone/>
             </a:pPr>
             <a:r>
@@ -21768,7 +21469,7 @@
           <a:bodyPr wrap="square" rtlCol="0" anchor="ctr"/>
           <a:lstStyle/>
           <a:p>
-            <a:pPr algn="ctr" indent="0" marL="0">
+            <a:pPr marL="0" indent="0" algn="ctr">
               <a:buNone/>
             </a:pPr>
             <a:r>
@@ -21807,7 +21508,7 @@
           <a:bodyPr wrap="square" rtlCol="0" anchor="ctr"/>
           <a:lstStyle/>
           <a:p>
-            <a:pPr algn="ctr" indent="0" marL="0">
+            <a:pPr marL="0" indent="0" algn="ctr">
               <a:buNone/>
             </a:pPr>
             <a:r>
@@ -21846,7 +21547,7 @@
           <a:bodyPr wrap="square" rtlCol="0" anchor="ctr"/>
           <a:lstStyle/>
           <a:p>
-            <a:pPr algn="ctr" indent="0" marL="0">
+            <a:pPr marL="0" indent="0" algn="ctr">
               <a:buNone/>
             </a:pPr>
             <a:r>
@@ -21863,7 +21564,7 @@
             <a:endParaRPr lang="en-US" sz="1200" dirty="0"/>
           </a:p>
           <a:p>
-            <a:pPr algn="ctr" indent="0" marL="0">
+            <a:pPr marL="0" indent="0" algn="ctr">
               <a:buNone/>
             </a:pPr>
             <a:r>
@@ -21902,7 +21603,7 @@
           <a:bodyPr wrap="square" rtlCol="0" anchor="ctr"/>
           <a:lstStyle/>
           <a:p>
-            <a:pPr algn="r" indent="0" marL="0">
+            <a:pPr marL="0" indent="0" algn="r">
               <a:buNone/>
             </a:pPr>
             <a:r>
@@ -21941,7 +21642,7 @@
           <a:bodyPr wrap="square" rtlCol="0" anchor="ctr"/>
           <a:lstStyle/>
           <a:p>
-            <a:pPr indent="0" marL="0">
+            <a:pPr marL="0" indent="0">
               <a:buNone/>
             </a:pPr>
             <a:r>
@@ -22260,4 +21961,299 @@
     </a:ext>
   </a:extLst>
 </a:theme>
+</file>
+
+<file path=ppt/theme/theme2.xml><?xml version="1.0" encoding="utf-8"?>
+<a:theme xmlns:a="http://schemas.openxmlformats.org/drawingml/2006/main" name="Office Theme">
+  <a:themeElements>
+    <a:clrScheme name="Office">
+      <a:dk1>
+        <a:sysClr val="windowText" lastClr="000000"/>
+      </a:dk1>
+      <a:lt1>
+        <a:sysClr val="window" lastClr="FFFFFF"/>
+      </a:lt1>
+      <a:dk2>
+        <a:srgbClr val="44546A"/>
+      </a:dk2>
+      <a:lt2>
+        <a:srgbClr val="E7E6E6"/>
+      </a:lt2>
+      <a:accent1>
+        <a:srgbClr val="4472C4"/>
+      </a:accent1>
+      <a:accent2>
+        <a:srgbClr val="ED7D31"/>
+      </a:accent2>
+      <a:accent3>
+        <a:srgbClr val="A5A5A5"/>
+      </a:accent3>
+      <a:accent4>
+        <a:srgbClr val="FFC000"/>
+      </a:accent4>
+      <a:accent5>
+        <a:srgbClr val="5B9BD5"/>
+      </a:accent5>
+      <a:accent6>
+        <a:srgbClr val="70AD47"/>
+      </a:accent6>
+      <a:hlink>
+        <a:srgbClr val="0563C1"/>
+      </a:hlink>
+      <a:folHlink>
+        <a:srgbClr val="954F72"/>
+      </a:folHlink>
+    </a:clrScheme>
+    <a:fontScheme name="Office">
+      <a:majorFont>
+        <a:latin typeface="Calibri Light" panose="020F0302020204030204"/>
+        <a:ea typeface=""/>
+        <a:cs typeface=""/>
+        <a:font script="Jpan" typeface="游ゴシック Light"/>
+        <a:font script="Hang" typeface="맑은 고딕"/>
+        <a:font script="Hans" typeface="等线 Light"/>
+        <a:font script="Hant" typeface="新細明體"/>
+        <a:font script="Arab" typeface="Times New Roman"/>
+        <a:font script="Hebr" typeface="Times New Roman"/>
+        <a:font script="Thai" typeface="Angsana New"/>
+        <a:font script="Ethi" typeface="Nyala"/>
+        <a:font script="Beng" typeface="Vrinda"/>
+        <a:font script="Gujr" typeface="Shruti"/>
+        <a:font script="Khmr" typeface="MoolBoran"/>
+        <a:font script="Knda" typeface="Tunga"/>
+        <a:font script="Guru" typeface="Raavi"/>
+        <a:font script="Cans" typeface="Euphemia"/>
+        <a:font script="Cher" typeface="Plantagenet Cherokee"/>
+        <a:font script="Yiii" typeface="Microsoft Yi Baiti"/>
+        <a:font script="Tibt" typeface="Microsoft Himalaya"/>
+        <a:font script="Thaa" typeface="MV Boli"/>
+        <a:font script="Deva" typeface="Mangal"/>
+        <a:font script="Telu" typeface="Gautami"/>
+        <a:font script="Taml" typeface="Latha"/>
+        <a:font script="Syrc" typeface="Estrangelo Edessa"/>
+        <a:font script="Orya" typeface="Kalinga"/>
+        <a:font script="Mlym" typeface="Kartika"/>
+        <a:font script="Laoo" typeface="DokChampa"/>
+        <a:font script="Sinh" typeface="Iskoola Pota"/>
+        <a:font script="Mong" typeface="Mongolian Baiti"/>
+        <a:font script="Viet" typeface="Times New Roman"/>
+        <a:font script="Uigh" typeface="Microsoft Uighur"/>
+        <a:font script="Geor" typeface="Sylfaen"/>
+        <a:font script="Armn" typeface="Arial"/>
+        <a:font script="Bugi" typeface="Leelawadee UI"/>
+        <a:font script="Bopo" typeface="Microsoft JhengHei"/>
+        <a:font script="Java" typeface="Javanese Text"/>
+        <a:font script="Lisu" typeface="Segoe UI"/>
+        <a:font script="Mymr" typeface="Myanmar Text"/>
+        <a:font script="Nkoo" typeface="Ebrima"/>
+        <a:font script="Olck" typeface="Nirmala UI"/>
+        <a:font script="Osma" typeface="Ebrima"/>
+        <a:font script="Phag" typeface="Phagspa"/>
+        <a:font script="Syrn" typeface="Estrangelo Edessa"/>
+        <a:font script="Syrj" typeface="Estrangelo Edessa"/>
+        <a:font script="Syre" typeface="Estrangelo Edessa"/>
+        <a:font script="Sora" typeface="Nirmala UI"/>
+        <a:font script="Tale" typeface="Microsoft Tai Le"/>
+        <a:font script="Talu" typeface="Microsoft New Tai Lue"/>
+        <a:font script="Tfng" typeface="Ebrima"/>
+      </a:majorFont>
+      <a:minorFont>
+        <a:latin typeface="Calibri" panose="020F0502020204030204"/>
+        <a:ea typeface=""/>
+        <a:cs typeface=""/>
+        <a:font script="Jpan" typeface="游ゴシック"/>
+        <a:font script="Hang" typeface="맑은 고딕"/>
+        <a:font script="Hans" typeface="等线"/>
+        <a:font script="Hant" typeface="新細明體"/>
+        <a:font script="Arab" typeface="Arial"/>
+        <a:font script="Hebr" typeface="Arial"/>
+        <a:font script="Thai" typeface="Cordia New"/>
+        <a:font script="Ethi" typeface="Nyala"/>
+        <a:font script="Beng" typeface="Vrinda"/>
+        <a:font script="Gujr" typeface="Shruti"/>
+        <a:font script="Khmr" typeface="DaunPenh"/>
+        <a:font script="Knda" typeface="Tunga"/>
+        <a:font script="Guru" typeface="Raavi"/>
+        <a:font script="Cans" typeface="Euphemia"/>
+        <a:font script="Cher" typeface="Plantagenet Cherokee"/>
+        <a:font script="Yiii" typeface="Microsoft Yi Baiti"/>
+        <a:font script="Tibt" typeface="Microsoft Himalaya"/>
+        <a:font script="Thaa" typeface="MV Boli"/>
+        <a:font script="Deva" typeface="Mangal"/>
+        <a:font script="Telu" typeface="Gautami"/>
+        <a:font script="Taml" typeface="Latha"/>
+        <a:font script="Syrc" typeface="Estrangelo Edessa"/>
+        <a:font script="Orya" typeface="Kalinga"/>
+        <a:font script="Mlym" typeface="Kartika"/>
+        <a:font script="Laoo" typeface="DokChampa"/>
+        <a:font script="Sinh" typeface="Iskoola Pota"/>
+        <a:font script="Mong" typeface="Mongolian Baiti"/>
+        <a:font script="Viet" typeface="Arial"/>
+        <a:font script="Uigh" typeface="Microsoft Uighur"/>
+        <a:font script="Geor" typeface="Sylfaen"/>
+        <a:font script="Armn" typeface="Arial"/>
+        <a:font script="Bugi" typeface="Leelawadee UI"/>
+        <a:font script="Bopo" typeface="Microsoft JhengHei"/>
+        <a:font script="Java" typeface="Javanese Text"/>
+        <a:font script="Lisu" typeface="Segoe UI"/>
+        <a:font script="Mymr" typeface="Myanmar Text"/>
+        <a:font script="Nkoo" typeface="Ebrima"/>
+        <a:font script="Olck" typeface="Nirmala UI"/>
+        <a:font script="Osma" typeface="Ebrima"/>
+        <a:font script="Phag" typeface="Phagspa"/>
+        <a:font script="Syrn" typeface="Estrangelo Edessa"/>
+        <a:font script="Syrj" typeface="Estrangelo Edessa"/>
+        <a:font script="Syre" typeface="Estrangelo Edessa"/>
+        <a:font script="Sora" typeface="Nirmala UI"/>
+        <a:font script="Tale" typeface="Microsoft Tai Le"/>
+        <a:font script="Talu" typeface="Microsoft New Tai Lue"/>
+        <a:font script="Tfng" typeface="Ebrima"/>
+      </a:minorFont>
+    </a:fontScheme>
+    <a:fmtScheme name="Office">
+      <a:fillStyleLst>
+        <a:solidFill>
+          <a:schemeClr val="phClr"/>
+        </a:solidFill>
+        <a:gradFill rotWithShape="1">
+          <a:gsLst>
+            <a:gs pos="0">
+              <a:schemeClr val="phClr">
+                <a:lumMod val="110000"/>
+                <a:satMod val="105000"/>
+                <a:tint val="67000"/>
+              </a:schemeClr>
+            </a:gs>
+            <a:gs pos="50000">
+              <a:schemeClr val="phClr">
+                <a:lumMod val="105000"/>
+                <a:satMod val="103000"/>
+                <a:tint val="73000"/>
+              </a:schemeClr>
+            </a:gs>
+            <a:gs pos="100000">
+              <a:schemeClr val="phClr">
+                <a:lumMod val="105000"/>
+                <a:satMod val="109000"/>
+                <a:tint val="81000"/>
+              </a:schemeClr>
+            </a:gs>
+          </a:gsLst>
+          <a:lin ang="5400000" scaled="0"/>
+        </a:gradFill>
+        <a:gradFill rotWithShape="1">
+          <a:gsLst>
+            <a:gs pos="0">
+              <a:schemeClr val="phClr">
+                <a:satMod val="103000"/>
+                <a:lumMod val="102000"/>
+                <a:tint val="94000"/>
+              </a:schemeClr>
+            </a:gs>
+            <a:gs pos="50000">
+              <a:schemeClr val="phClr">
+                <a:satMod val="110000"/>
+                <a:lumMod val="100000"/>
+                <a:shade val="100000"/>
+              </a:schemeClr>
+            </a:gs>
+            <a:gs pos="100000">
+              <a:schemeClr val="phClr">
+                <a:lumMod val="99000"/>
+                <a:satMod val="120000"/>
+                <a:shade val="78000"/>
+              </a:schemeClr>
+            </a:gs>
+          </a:gsLst>
+          <a:lin ang="5400000" scaled="0"/>
+        </a:gradFill>
+      </a:fillStyleLst>
+      <a:lnStyleLst>
+        <a:ln w="6350" cap="flat" cmpd="sng" algn="ctr">
+          <a:solidFill>
+            <a:schemeClr val="phClr"/>
+          </a:solidFill>
+          <a:prstDash val="solid"/>
+          <a:miter lim="800000"/>
+        </a:ln>
+        <a:ln w="12700" cap="flat" cmpd="sng" algn="ctr">
+          <a:solidFill>
+            <a:schemeClr val="phClr"/>
+          </a:solidFill>
+          <a:prstDash val="solid"/>
+          <a:miter lim="800000"/>
+        </a:ln>
+        <a:ln w="19050" cap="flat" cmpd="sng" algn="ctr">
+          <a:solidFill>
+            <a:schemeClr val="phClr"/>
+          </a:solidFill>
+          <a:prstDash val="solid"/>
+          <a:miter lim="800000"/>
+        </a:ln>
+      </a:lnStyleLst>
+      <a:effectStyleLst>
+        <a:effectStyle>
+          <a:effectLst/>
+        </a:effectStyle>
+        <a:effectStyle>
+          <a:effectLst/>
+        </a:effectStyle>
+        <a:effectStyle>
+          <a:effectLst>
+            <a:outerShdw blurRad="57150" dist="19050" dir="5400000" algn="ctr" rotWithShape="0">
+              <a:srgbClr val="000000">
+                <a:alpha val="63000"/>
+              </a:srgbClr>
+            </a:outerShdw>
+          </a:effectLst>
+        </a:effectStyle>
+      </a:effectStyleLst>
+      <a:bgFillStyleLst>
+        <a:solidFill>
+          <a:schemeClr val="phClr"/>
+        </a:solidFill>
+        <a:solidFill>
+          <a:schemeClr val="phClr">
+            <a:tint val="95000"/>
+            <a:satMod val="170000"/>
+          </a:schemeClr>
+        </a:solidFill>
+        <a:gradFill rotWithShape="1">
+          <a:gsLst>
+            <a:gs pos="0">
+              <a:schemeClr val="phClr">
+                <a:tint val="93000"/>
+                <a:satMod val="150000"/>
+                <a:shade val="98000"/>
+                <a:lumMod val="102000"/>
+              </a:schemeClr>
+            </a:gs>
+            <a:gs pos="50000">
+              <a:schemeClr val="phClr">
+                <a:tint val="98000"/>
+                <a:satMod val="130000"/>
+                <a:shade val="90000"/>
+                <a:lumMod val="103000"/>
+              </a:schemeClr>
+            </a:gs>
+            <a:gs pos="100000">
+              <a:schemeClr val="phClr">
+                <a:shade val="63000"/>
+                <a:satMod val="120000"/>
+              </a:schemeClr>
+            </a:gs>
+          </a:gsLst>
+          <a:lin ang="5400000" scaled="0"/>
+        </a:gradFill>
+      </a:bgFillStyleLst>
+    </a:fmtScheme>
+  </a:themeElements>
+  <a:objectDefaults/>
+  <a:extraClrSchemeLst/>
+  <a:extLst>
+    <a:ext uri="{05A4C25C-085E-4340-85A3-A5531E510DB2}">
+      <thm15:themeFamily xmlns:thm15="http://schemas.microsoft.com/office/thememl/2012/main" name="Office Theme" id="{62F939B6-93AF-4DB8-9C6B-D6C7DFDC589F}" vid="{4A3C46E8-61CC-4603-A589-7422A47A8E4A}"/>
+    </a:ext>
+  </a:extLst>
+</a:theme>
 </file>